--- a/assets/powerpoints/module-n7-emploi/A4-lire-un-ordre-du-jour.pptx
+++ b/assets/powerpoints/module-n7-emploi/A4-lire-un-ordre-du-jour.pptx
@@ -15,6 +15,7 @@
     <p:sldId id="263" r:id="rId15"/>
     <p:sldId id="264" r:id="rId16"/>
     <p:sldId id="265" r:id="rId17"/>
+    <p:sldId id="266" r:id="rId18"/>
   </p:sldIdLst>
   <p:sldSz cx="12191695" cy="6858000" type="screen4x3"/>
   <p:notesSz cx="6858000" cy="9144000"/>
@@ -581,6 +582,76 @@
           <a:lstStyle/>
           <a:p>
             <a:r>
+              <a:t>Le dire sans culpabiliser : presque personne ne lit les documents joints, y compris les francophones. C'est justement pour ça que celui qui le fait se distingue.</a:t>
+            </a:r>
+          </a:p>
+        </p:txBody>
+      </p:sp>
+      <p:sp>
+        <p:nvSpPr>
+          <p:cNvPr id="4" name="Slide Number Placeholder 3"/>
+          <p:cNvSpPr>
+            <a:spLocks noGrp="1"/>
+          </p:cNvSpPr>
+          <p:nvPr>
+            <p:ph type="sldNum" idx="5" sz="quarter"/>
+          </p:nvPr>
+        </p:nvSpPr>
+        <p:spPr/>
+      </p:sp>
+    </p:spTree>
+  </p:cSld>
+  <p:clrMapOvr>
+    <a:masterClrMapping/>
+  </p:clrMapOvr>
+</p:notes>
+</file>
+
+<file path=ppt/notesSlides/notesSlide11.xml><?xml version="1.0" encoding="utf-8"?>
+<p:notes xmlns:a="http://schemas.openxmlformats.org/drawingml/2006/main" xmlns:p="http://schemas.openxmlformats.org/presentationml/2006/main" xmlns:r="http://schemas.openxmlformats.org/officeDocument/2006/relationships">
+  <p:cSld>
+    <p:spTree>
+      <p:nvGrpSpPr>
+        <p:cNvPr id="1" name=""/>
+        <p:cNvGrpSpPr/>
+        <p:nvPr/>
+      </p:nvGrpSpPr>
+      <p:grpSpPr>
+        <a:xfrm>
+          <a:off x="0" y="0"/>
+          <a:ext cx="0" cy="0"/>
+          <a:chOff x="0" y="0"/>
+          <a:chExt cx="0" cy="0"/>
+        </a:xfrm>
+      </p:grpSpPr>
+      <p:sp>
+        <p:nvSpPr>
+          <p:cNvPr id="2" name="Slide Image Placeholder 1"/>
+          <p:cNvSpPr>
+            <a:spLocks noGrp="1"/>
+          </p:cNvSpPr>
+          <p:nvPr>
+            <p:ph type="sldImg" idx="2"/>
+          </p:nvPr>
+        </p:nvSpPr>
+        <p:spPr/>
+      </p:sp>
+      <p:sp>
+        <p:nvSpPr>
+          <p:cNvPr id="3" name="Notes Placeholder 2"/>
+          <p:cNvSpPr>
+            <a:spLocks noGrp="1"/>
+          </p:cNvSpPr>
+          <p:nvPr>
+            <p:ph type="body" idx="3" sz="quarter"/>
+          </p:nvPr>
+        </p:nvSpPr>
+        <p:spPr/>
+        <p:txBody>
+          <a:bodyPr/>
+          <a:lstStyle/>
+          <a:p>
+            <a:r>
               <a:t>Ramasser. Corriger surtout la durée demandée : ceux qui n'en donnent aucune sont ceux qui n'obtiendront rien.</a:t>
             </a:r>
           </a:p>
@@ -931,7 +1002,7 @@
           <a:lstStyle/>
           <a:p>
             <a:r>
-              <a:t>Ouvrir l'exercice `prOrdre` du module en parallèle : les élèves cliquent dans le texte pendant que le groupe répond à l'oral. C'est le premier exercice de type texte du module ; montrer une fois comment on arme une question avant de cliquer un passage.</a:t>
+              <a:t>Le texte même de l'exercice `prOrdre`. Le projeter et laisser lire en silence deux minutes avant la première question : c'est le premier texte suivi du module, et plusieurs élèves n'ont jamais lu d'ordre du jour.</a:t>
             </a:r>
           </a:p>
         </p:txBody>
@@ -1001,7 +1072,7 @@
           <a:lstStyle/>
           <a:p>
             <a:r>
-              <a:t>Corriger en groupe. Donner la bonne réponse, sans revenir sur qui s'est trompé.</a:t>
+              <a:t>Ouvrir l'exercice `prOrdre` du module en parallèle : les élèves cliquent dans le texte pendant que le groupe répond à l'oral. C'est le premier exercice de type texte du module ; montrer une fois comment on arme une question avant de cliquer un passage.</a:t>
             </a:r>
           </a:p>
         </p:txBody>
@@ -1071,7 +1142,7 @@
           <a:lstStyle/>
           <a:p>
             <a:r>
-              <a:t>Faire jouer la demande à deux, debout, en trente secondes : un élève demande, l'autre répond. Tout le monde passe.</a:t>
+              <a:t>Corriger en groupe. Donner la bonne réponse, sans revenir sur qui s'est trompé.</a:t>
             </a:r>
           </a:p>
         </p:txBody>
@@ -1141,7 +1212,7 @@
           <a:lstStyle/>
           <a:p>
             <a:r>
-              <a:t>Le dire sans culpabiliser : presque personne ne lit les documents joints, y compris les francophones. C'est justement pour ça que celui qui le fait se distingue.</a:t>
+              <a:t>Faire jouer la demande à deux, debout, en trente secondes : un élève demande, l'autre répond. Tout le monde passe.</a:t>
             </a:r>
           </a:p>
         </p:txBody>
@@ -4531,6 +4602,555 @@
       </p:sp>
       <p:sp>
         <p:nvSpPr>
+          <p:cNvPr id="5" name="TextBox 4"/>
+          <p:cNvSpPr txBox="1"/>
+          <p:nvPr/>
+        </p:nvSpPr>
+        <p:spPr>
+          <a:xfrm>
+            <a:off x="566928" y="420624"/>
+            <a:ext cx="11057839" cy="237744"/>
+          </a:xfrm>
+          <a:prstGeom prst="rect">
+            <a:avLst/>
+          </a:prstGeom>
+          <a:noFill/>
+        </p:spPr>
+        <p:txBody>
+          <a:bodyPr wrap="square" lIns="0" rIns="0" tIns="0" bIns="0" anchor="t">
+            <a:spAutoFit/>
+          </a:bodyPr>
+          <a:lstStyle/>
+          <a:p>
+            <a:pPr algn="l">
+              <a:lnSpc>
+                <a:spcPct val="135000"/>
+              </a:lnSpc>
+            </a:pPr>
+            <a:r>
+              <a:rPr sz="1300" b="1" i="0" spc="156">
+                <a:solidFill>
+                  <a:srgbClr val="0D7A6F"/>
+                </a:solidFill>
+                <a:latin typeface="Verdana"/>
+              </a:rPr>
+              <a:t>LECTURE</a:t>
+            </a:r>
+          </a:p>
+        </p:txBody>
+      </p:sp>
+      <p:sp>
+        <p:nvSpPr>
+          <p:cNvPr id="6" name="TextBox 5"/>
+          <p:cNvSpPr txBox="1"/>
+          <p:nvPr/>
+        </p:nvSpPr>
+        <p:spPr>
+          <a:xfrm>
+            <a:off x="566928" y="749808"/>
+            <a:ext cx="11057839" cy="877824"/>
+          </a:xfrm>
+          <a:prstGeom prst="rect">
+            <a:avLst/>
+          </a:prstGeom>
+          <a:noFill/>
+        </p:spPr>
+        <p:txBody>
+          <a:bodyPr wrap="square" lIns="0" rIns="0" tIns="0" bIns="0" anchor="t">
+            <a:spAutoFit/>
+          </a:bodyPr>
+          <a:lstStyle/>
+          <a:p>
+            <a:pPr algn="l">
+              <a:lnSpc>
+                <a:spcPct val="115000"/>
+              </a:lnSpc>
+            </a:pPr>
+            <a:r>
+              <a:rPr sz="3400" b="1" i="0">
+                <a:solidFill>
+                  <a:srgbClr val="17181A"/>
+                </a:solidFill>
+                <a:latin typeface="Verdana"/>
+              </a:rPr>
+              <a:t>Le piège le plus fréquent</a:t>
+            </a:r>
+          </a:p>
+        </p:txBody>
+      </p:sp>
+      <p:sp>
+        <p:nvSpPr>
+          <p:cNvPr id="7" name="Rounded Rectangle 6"/>
+          <p:cNvSpPr/>
+          <p:nvPr/>
+        </p:nvSpPr>
+        <p:spPr>
+          <a:xfrm>
+            <a:off x="566928" y="1856232"/>
+            <a:ext cx="5428335" cy="2331720"/>
+          </a:xfrm>
+          <a:prstGeom prst="roundRect">
+            <a:avLst>
+              <a:gd name="adj" fmla="val 6274"/>
+            </a:avLst>
+          </a:prstGeom>
+          <a:solidFill>
+            <a:srgbClr val="FFF6F5"/>
+          </a:solidFill>
+          <a:ln w="12700">
+            <a:solidFill>
+              <a:srgbClr val="DC2626"/>
+            </a:solidFill>
+          </a:ln>
+          <a:effectLst/>
+        </p:spPr>
+        <p:style>
+          <a:lnRef idx="1">
+            <a:schemeClr val="accent1"/>
+          </a:lnRef>
+          <a:fillRef idx="3">
+            <a:schemeClr val="accent1"/>
+          </a:fillRef>
+          <a:effectRef idx="2">
+            <a:schemeClr val="accent1"/>
+          </a:effectRef>
+          <a:fontRef idx="minor">
+            <a:schemeClr val="lt1"/>
+          </a:fontRef>
+        </p:style>
+        <p:txBody>
+          <a:bodyPr rtlCol="0" anchor="ctr"/>
+          <a:lstStyle/>
+          <a:p/>
+        </p:txBody>
+      </p:sp>
+      <p:sp>
+        <p:nvSpPr>
+          <p:cNvPr id="8" name="TextBox 7"/>
+          <p:cNvSpPr txBox="1"/>
+          <p:nvPr/>
+        </p:nvSpPr>
+        <p:spPr>
+          <a:xfrm>
+            <a:off x="932688" y="2130552"/>
+            <a:ext cx="4696815" cy="274320"/>
+          </a:xfrm>
+          <a:prstGeom prst="rect">
+            <a:avLst/>
+          </a:prstGeom>
+          <a:noFill/>
+        </p:spPr>
+        <p:txBody>
+          <a:bodyPr wrap="square" lIns="0" rIns="0" tIns="0" bIns="0" anchor="t">
+            <a:spAutoFit/>
+          </a:bodyPr>
+          <a:lstStyle/>
+          <a:p>
+            <a:pPr algn="l">
+              <a:lnSpc>
+                <a:spcPct val="135000"/>
+              </a:lnSpc>
+            </a:pPr>
+            <a:r>
+              <a:rPr sz="1300" b="1" i="0" spc="156">
+                <a:solidFill>
+                  <a:srgbClr val="B91C1C"/>
+                </a:solidFill>
+                <a:latin typeface="Verdana"/>
+              </a:rPr>
+              <a:t>ON ENTEND SOUVENT</a:t>
+            </a:r>
+          </a:p>
+        </p:txBody>
+      </p:sp>
+      <p:sp>
+        <p:nvSpPr>
+          <p:cNvPr id="9" name="TextBox 8"/>
+          <p:cNvSpPr txBox="1"/>
+          <p:nvPr/>
+        </p:nvSpPr>
+        <p:spPr>
+          <a:xfrm>
+            <a:off x="932688" y="2569464"/>
+            <a:ext cx="4696815" cy="1417320"/>
+          </a:xfrm>
+          <a:prstGeom prst="rect">
+            <a:avLst/>
+          </a:prstGeom>
+          <a:noFill/>
+        </p:spPr>
+        <p:txBody>
+          <a:bodyPr wrap="square" lIns="0" rIns="0" tIns="0" bIns="0" anchor="t">
+            <a:spAutoFit/>
+          </a:bodyPr>
+          <a:lstStyle/>
+          <a:p>
+            <a:pPr algn="l">
+              <a:lnSpc>
+                <a:spcPct val="130000"/>
+              </a:lnSpc>
+            </a:pPr>
+            <a:r>
+              <a:rPr sz="2500" b="1" i="0">
+                <a:solidFill>
+                  <a:srgbClr val="17181A"/>
+                </a:solidFill>
+                <a:latin typeface="Verdana"/>
+              </a:rPr>
+              <a:t>arriver sans avoir lu le document joint</a:t>
+            </a:r>
+          </a:p>
+        </p:txBody>
+      </p:sp>
+      <p:sp>
+        <p:nvSpPr>
+          <p:cNvPr id="10" name="Rounded Rectangle 9"/>
+          <p:cNvSpPr/>
+          <p:nvPr/>
+        </p:nvSpPr>
+        <p:spPr>
+          <a:xfrm>
+            <a:off x="6196431" y="1856232"/>
+            <a:ext cx="5428335" cy="2331720"/>
+          </a:xfrm>
+          <a:prstGeom prst="roundRect">
+            <a:avLst>
+              <a:gd name="adj" fmla="val 6274"/>
+            </a:avLst>
+          </a:prstGeom>
+          <a:solidFill>
+            <a:srgbClr val="E6F5EE"/>
+          </a:solidFill>
+          <a:ln w="12700">
+            <a:solidFill>
+              <a:srgbClr val="0A8F5B"/>
+            </a:solidFill>
+          </a:ln>
+          <a:effectLst/>
+        </p:spPr>
+        <p:style>
+          <a:lnRef idx="1">
+            <a:schemeClr val="accent1"/>
+          </a:lnRef>
+          <a:fillRef idx="3">
+            <a:schemeClr val="accent1"/>
+          </a:fillRef>
+          <a:effectRef idx="2">
+            <a:schemeClr val="accent1"/>
+          </a:effectRef>
+          <a:fontRef idx="minor">
+            <a:schemeClr val="lt1"/>
+          </a:fontRef>
+        </p:style>
+        <p:txBody>
+          <a:bodyPr rtlCol="0" anchor="ctr"/>
+          <a:lstStyle/>
+          <a:p/>
+        </p:txBody>
+      </p:sp>
+      <p:sp>
+        <p:nvSpPr>
+          <p:cNvPr id="11" name="TextBox 10"/>
+          <p:cNvSpPr txBox="1"/>
+          <p:nvPr/>
+        </p:nvSpPr>
+        <p:spPr>
+          <a:xfrm>
+            <a:off x="6562191" y="2130552"/>
+            <a:ext cx="4696815" cy="274320"/>
+          </a:xfrm>
+          <a:prstGeom prst="rect">
+            <a:avLst/>
+          </a:prstGeom>
+          <a:noFill/>
+        </p:spPr>
+        <p:txBody>
+          <a:bodyPr wrap="square" lIns="0" rIns="0" tIns="0" bIns="0" anchor="t">
+            <a:spAutoFit/>
+          </a:bodyPr>
+          <a:lstStyle/>
+          <a:p>
+            <a:pPr algn="l">
+              <a:lnSpc>
+                <a:spcPct val="135000"/>
+              </a:lnSpc>
+            </a:pPr>
+            <a:r>
+              <a:rPr sz="1300" b="1" i="0" spc="156">
+                <a:solidFill>
+                  <a:srgbClr val="07734A"/>
+                </a:solidFill>
+                <a:latin typeface="Verdana"/>
+              </a:rPr>
+              <a:t>IL FAUT DIRE PLUTÔT</a:t>
+            </a:r>
+          </a:p>
+        </p:txBody>
+      </p:sp>
+      <p:sp>
+        <p:nvSpPr>
+          <p:cNvPr id="12" name="TextBox 11"/>
+          <p:cNvSpPr txBox="1"/>
+          <p:nvPr/>
+        </p:nvSpPr>
+        <p:spPr>
+          <a:xfrm>
+            <a:off x="6562191" y="2569464"/>
+            <a:ext cx="4696815" cy="1417320"/>
+          </a:xfrm>
+          <a:prstGeom prst="rect">
+            <a:avLst/>
+          </a:prstGeom>
+          <a:noFill/>
+        </p:spPr>
+        <p:txBody>
+          <a:bodyPr wrap="square" lIns="0" rIns="0" tIns="0" bIns="0" anchor="t">
+            <a:spAutoFit/>
+          </a:bodyPr>
+          <a:lstStyle/>
+          <a:p>
+            <a:pPr algn="l">
+              <a:lnSpc>
+                <a:spcPct val="130000"/>
+              </a:lnSpc>
+            </a:pPr>
+            <a:r>
+              <a:rPr sz="2500" b="1" i="0">
+                <a:solidFill>
+                  <a:srgbClr val="17181A"/>
+                </a:solidFill>
+                <a:latin typeface="Verdana"/>
+              </a:rPr>
+              <a:t>le lire la veille, crayon en main</a:t>
+            </a:r>
+          </a:p>
+        </p:txBody>
+      </p:sp>
+      <p:sp>
+        <p:nvSpPr>
+          <p:cNvPr id="13" name="Rounded Rectangle 12"/>
+          <p:cNvSpPr/>
+          <p:nvPr/>
+        </p:nvSpPr>
+        <p:spPr>
+          <a:xfrm>
+            <a:off x="566928" y="4462272"/>
+            <a:ext cx="11057839" cy="1618487"/>
+          </a:xfrm>
+          <a:prstGeom prst="roundRect">
+            <a:avLst>
+              <a:gd name="adj" fmla="val 9039"/>
+            </a:avLst>
+          </a:prstGeom>
+          <a:solidFill>
+            <a:srgbClr val="FFFFFF"/>
+          </a:solidFill>
+          <a:ln w="12700">
+            <a:solidFill>
+              <a:srgbClr val="EAEAE8"/>
+            </a:solidFill>
+          </a:ln>
+          <a:effectLst/>
+        </p:spPr>
+        <p:style>
+          <a:lnRef idx="1">
+            <a:schemeClr val="accent1"/>
+          </a:lnRef>
+          <a:fillRef idx="3">
+            <a:schemeClr val="accent1"/>
+          </a:fillRef>
+          <a:effectRef idx="2">
+            <a:schemeClr val="accent1"/>
+          </a:effectRef>
+          <a:fontRef idx="minor">
+            <a:schemeClr val="lt1"/>
+          </a:fontRef>
+        </p:style>
+        <p:txBody>
+          <a:bodyPr rtlCol="0" anchor="ctr"/>
+          <a:lstStyle/>
+          <a:p/>
+        </p:txBody>
+      </p:sp>
+      <p:sp>
+        <p:nvSpPr>
+          <p:cNvPr id="14" name="TextBox 13"/>
+          <p:cNvSpPr txBox="1"/>
+          <p:nvPr/>
+        </p:nvSpPr>
+        <p:spPr>
+          <a:xfrm>
+            <a:off x="969264" y="4736592"/>
+            <a:ext cx="10234879" cy="1518920"/>
+          </a:xfrm>
+          <a:prstGeom prst="rect">
+            <a:avLst/>
+          </a:prstGeom>
+          <a:noFill/>
+        </p:spPr>
+        <p:txBody>
+          <a:bodyPr wrap="square" lIns="0" rIns="0" tIns="0" bIns="0" anchor="t">
+            <a:spAutoFit/>
+          </a:bodyPr>
+          <a:lstStyle/>
+          <a:p>
+            <a:pPr algn="l">
+              <a:lnSpc>
+                <a:spcPct val="145000"/>
+              </a:lnSpc>
+            </a:pPr>
+            <a:r>
+              <a:rPr sz="2000" b="0" i="0">
+                <a:solidFill>
+                  <a:srgbClr val="4B4F52"/>
+                </a:solidFill>
+                <a:latin typeface="Verdana"/>
+              </a:rPr>
+              <a:t>Le document joint est la seule partie de la réunion que vous pouvez maîtriser d'avance. C'est aussi ce qui vous permet de poser une question précise plutôt qu'une question générale - et une question précise est ce qui fait qu'on vous écoute la fois suivante.</a:t>
+            </a:r>
+          </a:p>
+        </p:txBody>
+      </p:sp>
+    </p:spTree>
+  </p:cSld>
+  <p:clrMapOvr>
+    <a:masterClrMapping/>
+  </p:clrMapOvr>
+</p:sld>
+</file>
+
+<file path=ppt/slides/slide11.xml><?xml version="1.0" encoding="utf-8"?>
+<p:sld xmlns:a="http://schemas.openxmlformats.org/drawingml/2006/main" xmlns:p="http://schemas.openxmlformats.org/presentationml/2006/main" xmlns:r="http://schemas.openxmlformats.org/officeDocument/2006/relationships">
+  <p:cSld>
+    <p:spTree>
+      <p:nvGrpSpPr>
+        <p:cNvPr id="1" name=""/>
+        <p:cNvGrpSpPr/>
+        <p:nvPr/>
+      </p:nvGrpSpPr>
+      <p:grpSpPr/>
+      <p:sp>
+        <p:nvSpPr>
+          <p:cNvPr id="2" name="Rectangle 1"/>
+          <p:cNvSpPr/>
+          <p:nvPr/>
+        </p:nvSpPr>
+        <p:spPr>
+          <a:xfrm>
+            <a:off x="0" y="0"/>
+            <a:ext cx="12191695" cy="6858000"/>
+          </a:xfrm>
+          <a:prstGeom prst="rect">
+            <a:avLst/>
+          </a:prstGeom>
+          <a:solidFill>
+            <a:srgbClr val="F7F7F5"/>
+          </a:solidFill>
+          <a:ln>
+            <a:noFill/>
+          </a:ln>
+          <a:effectLst/>
+        </p:spPr>
+        <p:style>
+          <a:lnRef idx="1">
+            <a:schemeClr val="accent1"/>
+          </a:lnRef>
+          <a:fillRef idx="3">
+            <a:schemeClr val="accent1"/>
+          </a:fillRef>
+          <a:effectRef idx="2">
+            <a:schemeClr val="accent1"/>
+          </a:effectRef>
+          <a:fontRef idx="minor">
+            <a:schemeClr val="lt1"/>
+          </a:fontRef>
+        </p:style>
+        <p:txBody>
+          <a:bodyPr rtlCol="0" anchor="ctr"/>
+          <a:lstStyle/>
+          <a:p/>
+        </p:txBody>
+      </p:sp>
+      <p:sp>
+        <p:nvSpPr>
+          <p:cNvPr id="3" name="TextBox 2"/>
+          <p:cNvSpPr txBox="1"/>
+          <p:nvPr/>
+        </p:nvSpPr>
+        <p:spPr>
+          <a:xfrm>
+            <a:off x="566928" y="6355080"/>
+            <a:ext cx="6400800" cy="219456"/>
+          </a:xfrm>
+          <a:prstGeom prst="rect">
+            <a:avLst/>
+          </a:prstGeom>
+          <a:noFill/>
+        </p:spPr>
+        <p:txBody>
+          <a:bodyPr wrap="square" lIns="0" rIns="0" tIns="0" bIns="0" anchor="t">
+            <a:spAutoFit/>
+          </a:bodyPr>
+          <a:lstStyle/>
+          <a:p>
+            <a:pPr algn="l">
+              <a:lnSpc>
+                <a:spcPct val="135000"/>
+              </a:lnSpc>
+            </a:pPr>
+            <a:r>
+              <a:rPr sz="1200" b="0" i="0">
+                <a:solidFill>
+                  <a:srgbClr val="6E7175"/>
+                </a:solidFill>
+                <a:latin typeface="Verdana"/>
+              </a:rPr>
+              <a:t>A4 · Présenter un projet au travail</a:t>
+            </a:r>
+          </a:p>
+        </p:txBody>
+      </p:sp>
+      <p:sp>
+        <p:nvSpPr>
+          <p:cNvPr id="4" name="TextBox 3"/>
+          <p:cNvSpPr txBox="1"/>
+          <p:nvPr/>
+        </p:nvSpPr>
+        <p:spPr>
+          <a:xfrm>
+            <a:off x="10710367" y="6355080"/>
+            <a:ext cx="914400" cy="219456"/>
+          </a:xfrm>
+          <a:prstGeom prst="rect">
+            <a:avLst/>
+          </a:prstGeom>
+          <a:noFill/>
+        </p:spPr>
+        <p:txBody>
+          <a:bodyPr wrap="square" lIns="0" rIns="0" tIns="0" bIns="0" anchor="t">
+            <a:spAutoFit/>
+          </a:bodyPr>
+          <a:lstStyle/>
+          <a:p>
+            <a:pPr algn="r">
+              <a:lnSpc>
+                <a:spcPct val="135000"/>
+              </a:lnSpc>
+            </a:pPr>
+            <a:r>
+              <a:rPr sz="1200" b="0" i="0">
+                <a:solidFill>
+                  <a:srgbClr val="6E7175"/>
+                </a:solidFill>
+                <a:latin typeface="Verdana"/>
+              </a:rPr>
+              <a:t>11</a:t>
+            </a:r>
+          </a:p>
+        </p:txBody>
+      </p:sp>
+      <p:sp>
+        <p:nvSpPr>
           <p:cNvPr id="5" name="Rectangle 4"/>
           <p:cNvSpPr/>
           <p:nvPr/>
@@ -8121,7 +8741,7 @@
                 </a:solidFill>
                 <a:latin typeface="Verdana"/>
               </a:rPr>
-              <a:t>COMPRÉHENSION</a:t>
+              <a:t>LE DOCUMENT</a:t>
             </a:r>
           </a:p>
         </p:txBody>
@@ -8167,57 +8787,18 @@
       </p:sp>
       <p:sp>
         <p:nvSpPr>
-          <p:cNvPr id="7" name="TextBox 6"/>
-          <p:cNvSpPr txBox="1"/>
-          <p:nvPr/>
-        </p:nvSpPr>
-        <p:spPr>
-          <a:xfrm>
-            <a:off x="566928" y="1645920"/>
-            <a:ext cx="11057839" cy="329184"/>
-          </a:xfrm>
-          <a:prstGeom prst="rect">
-            <a:avLst/>
-          </a:prstGeom>
-          <a:noFill/>
-        </p:spPr>
-        <p:txBody>
-          <a:bodyPr wrap="square" lIns="0" rIns="0" tIns="0" bIns="0" anchor="t">
-            <a:spAutoFit/>
-          </a:bodyPr>
-          <a:lstStyle/>
-          <a:p>
-            <a:pPr algn="l">
-              <a:lnSpc>
-                <a:spcPct val="135000"/>
-              </a:lnSpc>
-            </a:pPr>
-            <a:r>
-              <a:rPr sz="1800" b="0" i="0">
-                <a:solidFill>
-                  <a:srgbClr val="6E7175"/>
-                </a:solidFill>
-                <a:latin typeface="Verdana"/>
-              </a:rPr>
-              <a:t>Répondez d'après le document projeté au module.</a:t>
-            </a:r>
-          </a:p>
-        </p:txBody>
-      </p:sp>
-      <p:sp>
-        <p:nvSpPr>
-          <p:cNvPr id="8" name="Rounded Rectangle 7"/>
+          <p:cNvPr id="7" name="Rounded Rectangle 6"/>
           <p:cNvSpPr/>
           <p:nvPr/>
         </p:nvSpPr>
         <p:spPr>
           <a:xfrm>
-            <a:off x="566928" y="2139696"/>
-            <a:ext cx="11057839" cy="559816"/>
+            <a:off x="566928" y="1737360"/>
+            <a:ext cx="11057839" cy="4335526"/>
           </a:xfrm>
           <a:prstGeom prst="roundRect">
             <a:avLst>
-              <a:gd name="adj" fmla="val 26134"/>
+              <a:gd name="adj" fmla="val 3374"/>
             </a:avLst>
           </a:prstGeom>
           <a:solidFill>
@@ -8252,58 +8833,14 @@
       </p:sp>
       <p:sp>
         <p:nvSpPr>
-          <p:cNvPr id="9" name="Rounded Rectangle 8"/>
-          <p:cNvSpPr/>
-          <p:nvPr/>
-        </p:nvSpPr>
-        <p:spPr>
-          <a:xfrm>
-            <a:off x="841247" y="2236724"/>
-            <a:ext cx="365760" cy="365760"/>
-          </a:xfrm>
-          <a:prstGeom prst="roundRect">
-            <a:avLst>
-              <a:gd name="adj" fmla="val 32500"/>
-            </a:avLst>
-          </a:prstGeom>
-          <a:solidFill>
-            <a:srgbClr val="DCF2EF"/>
-          </a:solidFill>
-          <a:ln>
-            <a:noFill/>
-          </a:ln>
-          <a:effectLst/>
-        </p:spPr>
-        <p:style>
-          <a:lnRef idx="1">
-            <a:schemeClr val="accent1"/>
-          </a:lnRef>
-          <a:fillRef idx="3">
-            <a:schemeClr val="accent1"/>
-          </a:fillRef>
-          <a:effectRef idx="2">
-            <a:schemeClr val="accent1"/>
-          </a:effectRef>
-          <a:fontRef idx="minor">
-            <a:schemeClr val="lt1"/>
-          </a:fontRef>
-        </p:style>
-        <p:txBody>
-          <a:bodyPr rtlCol="0" anchor="ctr"/>
-          <a:lstStyle/>
-          <a:p/>
-        </p:txBody>
-      </p:sp>
-      <p:sp>
-        <p:nvSpPr>
-          <p:cNvPr id="10" name="TextBox 9"/>
+          <p:cNvPr id="8" name="TextBox 7"/>
           <p:cNvSpPr txBox="1"/>
           <p:nvPr/>
         </p:nvSpPr>
         <p:spPr>
           <a:xfrm>
-            <a:off x="841247" y="2300732"/>
-            <a:ext cx="365760" cy="256032"/>
+            <a:off x="978408" y="1993391"/>
+            <a:ext cx="10234879" cy="552196"/>
           </a:xfrm>
           <a:prstGeom prst="rect">
             <a:avLst/>
@@ -8316,33 +8853,33 @@
           </a:bodyPr>
           <a:lstStyle/>
           <a:p>
-            <a:pPr algn="ctr">
+            <a:pPr algn="l">
               <a:lnSpc>
-                <a:spcPct val="135000"/>
+                <a:spcPct val="145000"/>
               </a:lnSpc>
             </a:pPr>
             <a:r>
-              <a:rPr sz="1500" b="1" i="0">
-                <a:solidFill>
-                  <a:srgbClr val="0D7A6F"/>
+              <a:rPr sz="1400" b="0" i="0">
+                <a:solidFill>
+                  <a:srgbClr val="3A3D40"/>
                 </a:solidFill>
                 <a:latin typeface="Verdana"/>
               </a:rPr>
-              <a:t>1</a:t>
-            </a:r>
-          </a:p>
-        </p:txBody>
-      </p:sp>
-      <p:sp>
-        <p:nvSpPr>
-          <p:cNvPr id="11" name="TextBox 10"/>
+              <a:t>MEUBLES RIVE-DU-NORD — RÉUNION DE PRODUCTION. Lundi 8 septembre, de 8 h à 9 h 15, salle Bellerive. Convocation : Renaud Cormier, chef de production.</a:t>
+            </a:r>
+          </a:p>
+        </p:txBody>
+      </p:sp>
+      <p:sp>
+        <p:nvSpPr>
+          <p:cNvPr id="9" name="TextBox 8"/>
           <p:cNvSpPr txBox="1"/>
           <p:nvPr/>
         </p:nvSpPr>
         <p:spPr>
           <a:xfrm>
-            <a:off x="1344168" y="2295144"/>
-            <a:ext cx="10097719" cy="285496"/>
+            <a:off x="978408" y="2673603"/>
+            <a:ext cx="10234879" cy="552196"/>
           </a:xfrm>
           <a:prstGeom prst="rect">
             <a:avLst/>
@@ -8357,7 +8894,7 @@
           <a:p>
             <a:pPr algn="l">
               <a:lnSpc>
-                <a:spcPct val="140000"/>
+                <a:spcPct val="145000"/>
               </a:lnSpc>
             </a:pPr>
             <a:r>
@@ -8367,111 +8904,21 @@
                 </a:solidFill>
                 <a:latin typeface="Verdana"/>
               </a:rPr>
-              <a:t>Quand la réunion a-t-elle lieu, et pendant combien de temps ?</a:t>
-            </a:r>
-          </a:p>
-        </p:txBody>
-      </p:sp>
-      <p:sp>
-        <p:nvSpPr>
-          <p:cNvPr id="12" name="Rounded Rectangle 11"/>
-          <p:cNvSpPr/>
-          <p:nvPr/>
-        </p:nvSpPr>
-        <p:spPr>
-          <a:xfrm>
-            <a:off x="566928" y="2827528"/>
-            <a:ext cx="11057839" cy="559816"/>
-          </a:xfrm>
-          <a:prstGeom prst="roundRect">
-            <a:avLst>
-              <a:gd name="adj" fmla="val 26134"/>
-            </a:avLst>
-          </a:prstGeom>
-          <a:solidFill>
-            <a:srgbClr val="FFFFFF"/>
-          </a:solidFill>
-          <a:ln w="12700">
-            <a:solidFill>
-              <a:srgbClr val="EAEAE8"/>
-            </a:solidFill>
-          </a:ln>
-          <a:effectLst/>
-        </p:spPr>
-        <p:style>
-          <a:lnRef idx="1">
-            <a:schemeClr val="accent1"/>
-          </a:lnRef>
-          <a:fillRef idx="3">
-            <a:schemeClr val="accent1"/>
-          </a:fillRef>
-          <a:effectRef idx="2">
-            <a:schemeClr val="accent1"/>
-          </a:effectRef>
-          <a:fontRef idx="minor">
-            <a:schemeClr val="lt1"/>
-          </a:fontRef>
-        </p:style>
-        <p:txBody>
-          <a:bodyPr rtlCol="0" anchor="ctr"/>
-          <a:lstStyle/>
-          <a:p/>
-        </p:txBody>
-      </p:sp>
-      <p:sp>
-        <p:nvSpPr>
-          <p:cNvPr id="13" name="Rounded Rectangle 12"/>
-          <p:cNvSpPr/>
-          <p:nvPr/>
-        </p:nvSpPr>
-        <p:spPr>
-          <a:xfrm>
-            <a:off x="841247" y="2924556"/>
-            <a:ext cx="365760" cy="365760"/>
-          </a:xfrm>
-          <a:prstGeom prst="roundRect">
-            <a:avLst>
-              <a:gd name="adj" fmla="val 32500"/>
-            </a:avLst>
-          </a:prstGeom>
-          <a:solidFill>
-            <a:srgbClr val="DCF2EF"/>
-          </a:solidFill>
-          <a:ln>
-            <a:noFill/>
-          </a:ln>
-          <a:effectLst/>
-        </p:spPr>
-        <p:style>
-          <a:lnRef idx="1">
-            <a:schemeClr val="accent1"/>
-          </a:lnRef>
-          <a:fillRef idx="3">
-            <a:schemeClr val="accent1"/>
-          </a:fillRef>
-          <a:effectRef idx="2">
-            <a:schemeClr val="accent1"/>
-          </a:effectRef>
-          <a:fontRef idx="minor">
-            <a:schemeClr val="lt1"/>
-          </a:fontRef>
-        </p:style>
-        <p:txBody>
-          <a:bodyPr rtlCol="0" anchor="ctr"/>
-          <a:lstStyle/>
-          <a:p/>
-        </p:txBody>
-      </p:sp>
-      <p:sp>
-        <p:nvSpPr>
-          <p:cNvPr id="14" name="TextBox 13"/>
+              <a:t>Personnes convoquées : les cinq chefs d'équipe, la coordonnatrice adjointe à l'expédition et la représentante en santé et en sécurité. Absence à signaler à la réception avant le vendredi 16 h.</a:t>
+            </a:r>
+          </a:p>
+        </p:txBody>
+      </p:sp>
+      <p:sp>
+        <p:nvSpPr>
+          <p:cNvPr id="10" name="TextBox 9"/>
           <p:cNvSpPr txBox="1"/>
           <p:nvPr/>
         </p:nvSpPr>
         <p:spPr>
           <a:xfrm>
-            <a:off x="841247" y="2988564"/>
-            <a:ext cx="365760" cy="256032"/>
+            <a:off x="978408" y="3353815"/>
+            <a:ext cx="10234879" cy="552196"/>
           </a:xfrm>
           <a:prstGeom prst="rect">
             <a:avLst/>
@@ -8484,33 +8931,33 @@
           </a:bodyPr>
           <a:lstStyle/>
           <a:p>
-            <a:pPr algn="ctr">
+            <a:pPr algn="l">
               <a:lnSpc>
-                <a:spcPct val="135000"/>
+                <a:spcPct val="145000"/>
               </a:lnSpc>
             </a:pPr>
             <a:r>
-              <a:rPr sz="1500" b="1" i="0">
-                <a:solidFill>
-                  <a:srgbClr val="0D7A6F"/>
+              <a:rPr sz="1400" b="0" i="0">
+                <a:solidFill>
+                  <a:srgbClr val="3A3D40"/>
                 </a:solidFill>
                 <a:latin typeface="Verdana"/>
               </a:rPr>
-              <a:t>2</a:t>
-            </a:r>
-          </a:p>
-        </p:txBody>
-      </p:sp>
-      <p:sp>
-        <p:nvSpPr>
-          <p:cNvPr id="15" name="TextBox 14"/>
+              <a:t>1. Réaménagement du quai d'expédition — présentation du projet, douze minutes suivies d'une période de questions. R. Cormier.</a:t>
+            </a:r>
+          </a:p>
+        </p:txBody>
+      </p:sp>
+      <p:sp>
+        <p:nvSpPr>
+          <p:cNvPr id="11" name="TextBox 10"/>
           <p:cNvSpPr txBox="1"/>
           <p:nvPr/>
         </p:nvSpPr>
         <p:spPr>
           <a:xfrm>
-            <a:off x="1344168" y="2982975"/>
-            <a:ext cx="10097719" cy="285496"/>
+            <a:off x="978408" y="4034027"/>
+            <a:ext cx="10234879" cy="294386"/>
           </a:xfrm>
           <a:prstGeom prst="rect">
             <a:avLst/>
@@ -8525,7 +8972,7 @@
           <a:p>
             <a:pPr algn="l">
               <a:lnSpc>
-                <a:spcPct val="140000"/>
+                <a:spcPct val="145000"/>
               </a:lnSpc>
             </a:pPr>
             <a:r>
@@ -8535,111 +8982,21 @@
                 </a:solidFill>
                 <a:latin typeface="Verdana"/>
               </a:rPr>
-              <a:t>Qui convoque la réunion ?</a:t>
-            </a:r>
-          </a:p>
-        </p:txBody>
-      </p:sp>
-      <p:sp>
-        <p:nvSpPr>
-          <p:cNvPr id="16" name="Rounded Rectangle 15"/>
-          <p:cNvSpPr/>
-          <p:nvPr/>
-        </p:nvSpPr>
-        <p:spPr>
-          <a:xfrm>
-            <a:off x="566928" y="3515359"/>
-            <a:ext cx="11057839" cy="559816"/>
-          </a:xfrm>
-          <a:prstGeom prst="roundRect">
-            <a:avLst>
-              <a:gd name="adj" fmla="val 26134"/>
-            </a:avLst>
-          </a:prstGeom>
-          <a:solidFill>
-            <a:srgbClr val="FFFFFF"/>
-          </a:solidFill>
-          <a:ln w="12700">
-            <a:solidFill>
-              <a:srgbClr val="EAEAE8"/>
-            </a:solidFill>
-          </a:ln>
-          <a:effectLst/>
-        </p:spPr>
-        <p:style>
-          <a:lnRef idx="1">
-            <a:schemeClr val="accent1"/>
-          </a:lnRef>
-          <a:fillRef idx="3">
-            <a:schemeClr val="accent1"/>
-          </a:fillRef>
-          <a:effectRef idx="2">
-            <a:schemeClr val="accent1"/>
-          </a:effectRef>
-          <a:fontRef idx="minor">
-            <a:schemeClr val="lt1"/>
-          </a:fontRef>
-        </p:style>
-        <p:txBody>
-          <a:bodyPr rtlCol="0" anchor="ctr"/>
-          <a:lstStyle/>
-          <a:p/>
-        </p:txBody>
-      </p:sp>
-      <p:sp>
-        <p:nvSpPr>
-          <p:cNvPr id="17" name="Rounded Rectangle 16"/>
-          <p:cNvSpPr/>
-          <p:nvPr/>
-        </p:nvSpPr>
-        <p:spPr>
-          <a:xfrm>
-            <a:off x="841247" y="3612388"/>
-            <a:ext cx="365760" cy="365760"/>
-          </a:xfrm>
-          <a:prstGeom prst="roundRect">
-            <a:avLst>
-              <a:gd name="adj" fmla="val 32500"/>
-            </a:avLst>
-          </a:prstGeom>
-          <a:solidFill>
-            <a:srgbClr val="DCF2EF"/>
-          </a:solidFill>
-          <a:ln>
-            <a:noFill/>
-          </a:ln>
-          <a:effectLst/>
-        </p:spPr>
-        <p:style>
-          <a:lnRef idx="1">
-            <a:schemeClr val="accent1"/>
-          </a:lnRef>
-          <a:fillRef idx="3">
-            <a:schemeClr val="accent1"/>
-          </a:fillRef>
-          <a:effectRef idx="2">
-            <a:schemeClr val="accent1"/>
-          </a:effectRef>
-          <a:fontRef idx="minor">
-            <a:schemeClr val="lt1"/>
-          </a:fontRef>
-        </p:style>
-        <p:txBody>
-          <a:bodyPr rtlCol="0" anchor="ctr"/>
-          <a:lstStyle/>
-          <a:p/>
-        </p:txBody>
-      </p:sp>
-      <p:sp>
-        <p:nvSpPr>
-          <p:cNvPr id="18" name="TextBox 17"/>
+              <a:t>2. Retards de livraison du mois d'août — tour de table. Les chefs d'équipe.</a:t>
+            </a:r>
+          </a:p>
+        </p:txBody>
+      </p:sp>
+      <p:sp>
+        <p:nvSpPr>
+          <p:cNvPr id="12" name="TextBox 11"/>
           <p:cNvSpPr txBox="1"/>
           <p:nvPr/>
         </p:nvSpPr>
         <p:spPr>
           <a:xfrm>
-            <a:off x="841247" y="3676395"/>
-            <a:ext cx="365760" cy="256032"/>
+            <a:off x="978408" y="4456430"/>
+            <a:ext cx="10234879" cy="294386"/>
           </a:xfrm>
           <a:prstGeom prst="rect">
             <a:avLst/>
@@ -8652,33 +9009,33 @@
           </a:bodyPr>
           <a:lstStyle/>
           <a:p>
-            <a:pPr algn="ctr">
+            <a:pPr algn="l">
               <a:lnSpc>
-                <a:spcPct val="135000"/>
+                <a:spcPct val="145000"/>
               </a:lnSpc>
             </a:pPr>
             <a:r>
-              <a:rPr sz="1500" b="1" i="0">
-                <a:solidFill>
-                  <a:srgbClr val="0D7A6F"/>
+              <a:rPr sz="1400" b="0" i="0">
+                <a:solidFill>
+                  <a:srgbClr val="3A3D40"/>
                 </a:solidFill>
                 <a:latin typeface="Verdana"/>
               </a:rPr>
-              <a:t>3</a:t>
-            </a:r>
-          </a:p>
-        </p:txBody>
-      </p:sp>
-      <p:sp>
-        <p:nvSpPr>
-          <p:cNvPr id="19" name="TextBox 18"/>
+              <a:t>3. Rappel de la procédure de cadenassage — cinq minutes. T. Lapointe.</a:t>
+            </a:r>
+          </a:p>
+        </p:txBody>
+      </p:sp>
+      <p:sp>
+        <p:nvSpPr>
+          <p:cNvPr id="13" name="TextBox 12"/>
           <p:cNvSpPr txBox="1"/>
           <p:nvPr/>
         </p:nvSpPr>
         <p:spPr>
           <a:xfrm>
-            <a:off x="1344168" y="3670807"/>
-            <a:ext cx="10097719" cy="285496"/>
+            <a:off x="978408" y="4878832"/>
+            <a:ext cx="10234879" cy="294386"/>
           </a:xfrm>
           <a:prstGeom prst="rect">
             <a:avLst/>
@@ -8693,7 +9050,7 @@
           <a:p>
             <a:pPr algn="l">
               <a:lnSpc>
-                <a:spcPct val="140000"/>
+                <a:spcPct val="145000"/>
               </a:lnSpc>
             </a:pPr>
             <a:r>
@@ -8703,111 +9060,21 @@
                 </a:solidFill>
                 <a:latin typeface="Verdana"/>
               </a:rPr>
-              <a:t>Combien de temps dure la présentation du point 1 ?</a:t>
-            </a:r>
-          </a:p>
-        </p:txBody>
-      </p:sp>
-      <p:sp>
-        <p:nvSpPr>
-          <p:cNvPr id="20" name="Rounded Rectangle 19"/>
-          <p:cNvSpPr/>
-          <p:nvPr/>
-        </p:nvSpPr>
-        <p:spPr>
-          <a:xfrm>
-            <a:off x="566928" y="4203192"/>
-            <a:ext cx="11057839" cy="559816"/>
-          </a:xfrm>
-          <a:prstGeom prst="roundRect">
-            <a:avLst>
-              <a:gd name="adj" fmla="val 26134"/>
-            </a:avLst>
-          </a:prstGeom>
-          <a:solidFill>
-            <a:srgbClr val="FFFFFF"/>
-          </a:solidFill>
-          <a:ln w="12700">
-            <a:solidFill>
-              <a:srgbClr val="EAEAE8"/>
-            </a:solidFill>
-          </a:ln>
-          <a:effectLst/>
-        </p:spPr>
-        <p:style>
-          <a:lnRef idx="1">
-            <a:schemeClr val="accent1"/>
-          </a:lnRef>
-          <a:fillRef idx="3">
-            <a:schemeClr val="accent1"/>
-          </a:fillRef>
-          <a:effectRef idx="2">
-            <a:schemeClr val="accent1"/>
-          </a:effectRef>
-          <a:fontRef idx="minor">
-            <a:schemeClr val="lt1"/>
-          </a:fontRef>
-        </p:style>
-        <p:txBody>
-          <a:bodyPr rtlCol="0" anchor="ctr"/>
-          <a:lstStyle/>
-          <a:p/>
-        </p:txBody>
-      </p:sp>
-      <p:sp>
-        <p:nvSpPr>
-          <p:cNvPr id="21" name="Rounded Rectangle 20"/>
-          <p:cNvSpPr/>
-          <p:nvPr/>
-        </p:nvSpPr>
-        <p:spPr>
-          <a:xfrm>
-            <a:off x="841247" y="4300220"/>
-            <a:ext cx="365760" cy="365760"/>
-          </a:xfrm>
-          <a:prstGeom prst="roundRect">
-            <a:avLst>
-              <a:gd name="adj" fmla="val 32500"/>
-            </a:avLst>
-          </a:prstGeom>
-          <a:solidFill>
-            <a:srgbClr val="DCF2EF"/>
-          </a:solidFill>
-          <a:ln>
-            <a:noFill/>
-          </a:ln>
-          <a:effectLst/>
-        </p:spPr>
-        <p:style>
-          <a:lnRef idx="1">
-            <a:schemeClr val="accent1"/>
-          </a:lnRef>
-          <a:fillRef idx="3">
-            <a:schemeClr val="accent1"/>
-          </a:fillRef>
-          <a:effectRef idx="2">
-            <a:schemeClr val="accent1"/>
-          </a:effectRef>
-          <a:fontRef idx="minor">
-            <a:schemeClr val="lt1"/>
-          </a:fontRef>
-        </p:style>
-        <p:txBody>
-          <a:bodyPr rtlCol="0" anchor="ctr"/>
-          <a:lstStyle/>
-          <a:p/>
-        </p:txBody>
-      </p:sp>
-      <p:sp>
-        <p:nvSpPr>
-          <p:cNvPr id="22" name="TextBox 21"/>
+              <a:t>4. Varia. Les points de varia se demandent en début de réunion, pas pendant.</a:t>
+            </a:r>
+          </a:p>
+        </p:txBody>
+      </p:sp>
+      <p:sp>
+        <p:nvSpPr>
+          <p:cNvPr id="14" name="TextBox 13"/>
           <p:cNvSpPr txBox="1"/>
           <p:nvPr/>
         </p:nvSpPr>
         <p:spPr>
           <a:xfrm>
-            <a:off x="841247" y="4364228"/>
-            <a:ext cx="365760" cy="256032"/>
+            <a:off x="978408" y="5301234"/>
+            <a:ext cx="10234879" cy="552196"/>
           </a:xfrm>
           <a:prstGeom prst="rect">
             <a:avLst/>
@@ -8820,394 +9087,19 @@
           </a:bodyPr>
           <a:lstStyle/>
           <a:p>
-            <a:pPr algn="ctr">
+            <a:pPr algn="l">
               <a:lnSpc>
-                <a:spcPct val="135000"/>
+                <a:spcPct val="145000"/>
               </a:lnSpc>
             </a:pPr>
             <a:r>
-              <a:rPr sz="1500" b="1" i="0">
-                <a:solidFill>
-                  <a:srgbClr val="0D7A6F"/>
+              <a:rPr sz="1400" b="0" i="0">
+                <a:solidFill>
+                  <a:srgbClr val="3A3D40"/>
                 </a:solidFill>
                 <a:latin typeface="Verdana"/>
               </a:rPr>
-              <a:t>4</a:t>
-            </a:r>
-          </a:p>
-        </p:txBody>
-      </p:sp>
-      <p:sp>
-        <p:nvSpPr>
-          <p:cNvPr id="23" name="TextBox 22"/>
-          <p:cNvSpPr txBox="1"/>
-          <p:nvPr/>
-        </p:nvSpPr>
-        <p:spPr>
-          <a:xfrm>
-            <a:off x="1344168" y="4358640"/>
-            <a:ext cx="10097719" cy="285496"/>
-          </a:xfrm>
-          <a:prstGeom prst="rect">
-            <a:avLst/>
-          </a:prstGeom>
-          <a:noFill/>
-        </p:spPr>
-        <p:txBody>
-          <a:bodyPr wrap="square" lIns="0" rIns="0" tIns="0" bIns="0" anchor="t">
-            <a:spAutoFit/>
-          </a:bodyPr>
-          <a:lstStyle/>
-          <a:p>
-            <a:pPr algn="l">
-              <a:lnSpc>
-                <a:spcPct val="140000"/>
-              </a:lnSpc>
-            </a:pPr>
-            <a:r>
-              <a:rPr sz="1400" b="0" i="0">
-                <a:solidFill>
-                  <a:srgbClr val="3A3D40"/>
-                </a:solidFill>
-                <a:latin typeface="Verdana"/>
-              </a:rPr>
-              <a:t>De quoi Thérèse Lapointe va-t-elle parler ?</a:t>
-            </a:r>
-          </a:p>
-        </p:txBody>
-      </p:sp>
-      <p:sp>
-        <p:nvSpPr>
-          <p:cNvPr id="24" name="Rounded Rectangle 23"/>
-          <p:cNvSpPr/>
-          <p:nvPr/>
-        </p:nvSpPr>
-        <p:spPr>
-          <a:xfrm>
-            <a:off x="566928" y="4891023"/>
-            <a:ext cx="11057839" cy="559816"/>
-          </a:xfrm>
-          <a:prstGeom prst="roundRect">
-            <a:avLst>
-              <a:gd name="adj" fmla="val 26134"/>
-            </a:avLst>
-          </a:prstGeom>
-          <a:solidFill>
-            <a:srgbClr val="FFFFFF"/>
-          </a:solidFill>
-          <a:ln w="12700">
-            <a:solidFill>
-              <a:srgbClr val="EAEAE8"/>
-            </a:solidFill>
-          </a:ln>
-          <a:effectLst/>
-        </p:spPr>
-        <p:style>
-          <a:lnRef idx="1">
-            <a:schemeClr val="accent1"/>
-          </a:lnRef>
-          <a:fillRef idx="3">
-            <a:schemeClr val="accent1"/>
-          </a:fillRef>
-          <a:effectRef idx="2">
-            <a:schemeClr val="accent1"/>
-          </a:effectRef>
-          <a:fontRef idx="minor">
-            <a:schemeClr val="lt1"/>
-          </a:fontRef>
-        </p:style>
-        <p:txBody>
-          <a:bodyPr rtlCol="0" anchor="ctr"/>
-          <a:lstStyle/>
-          <a:p/>
-        </p:txBody>
-      </p:sp>
-      <p:sp>
-        <p:nvSpPr>
-          <p:cNvPr id="25" name="Rounded Rectangle 24"/>
-          <p:cNvSpPr/>
-          <p:nvPr/>
-        </p:nvSpPr>
-        <p:spPr>
-          <a:xfrm>
-            <a:off x="841247" y="4988051"/>
-            <a:ext cx="365760" cy="365760"/>
-          </a:xfrm>
-          <a:prstGeom prst="roundRect">
-            <a:avLst>
-              <a:gd name="adj" fmla="val 32500"/>
-            </a:avLst>
-          </a:prstGeom>
-          <a:solidFill>
-            <a:srgbClr val="DCF2EF"/>
-          </a:solidFill>
-          <a:ln>
-            <a:noFill/>
-          </a:ln>
-          <a:effectLst/>
-        </p:spPr>
-        <p:style>
-          <a:lnRef idx="1">
-            <a:schemeClr val="accent1"/>
-          </a:lnRef>
-          <a:fillRef idx="3">
-            <a:schemeClr val="accent1"/>
-          </a:fillRef>
-          <a:effectRef idx="2">
-            <a:schemeClr val="accent1"/>
-          </a:effectRef>
-          <a:fontRef idx="minor">
-            <a:schemeClr val="lt1"/>
-          </a:fontRef>
-        </p:style>
-        <p:txBody>
-          <a:bodyPr rtlCol="0" anchor="ctr"/>
-          <a:lstStyle/>
-          <a:p/>
-        </p:txBody>
-      </p:sp>
-      <p:sp>
-        <p:nvSpPr>
-          <p:cNvPr id="26" name="TextBox 25"/>
-          <p:cNvSpPr txBox="1"/>
-          <p:nvPr/>
-        </p:nvSpPr>
-        <p:spPr>
-          <a:xfrm>
-            <a:off x="841247" y="5052059"/>
-            <a:ext cx="365760" cy="256032"/>
-          </a:xfrm>
-          <a:prstGeom prst="rect">
-            <a:avLst/>
-          </a:prstGeom>
-          <a:noFill/>
-        </p:spPr>
-        <p:txBody>
-          <a:bodyPr wrap="square" lIns="0" rIns="0" tIns="0" bIns="0" anchor="t">
-            <a:spAutoFit/>
-          </a:bodyPr>
-          <a:lstStyle/>
-          <a:p>
-            <a:pPr algn="ctr">
-              <a:lnSpc>
-                <a:spcPct val="135000"/>
-              </a:lnSpc>
-            </a:pPr>
-            <a:r>
-              <a:rPr sz="1500" b="1" i="0">
-                <a:solidFill>
-                  <a:srgbClr val="0D7A6F"/>
-                </a:solidFill>
-                <a:latin typeface="Verdana"/>
-              </a:rPr>
-              <a:t>5</a:t>
-            </a:r>
-          </a:p>
-        </p:txBody>
-      </p:sp>
-      <p:sp>
-        <p:nvSpPr>
-          <p:cNvPr id="27" name="TextBox 26"/>
-          <p:cNvSpPr txBox="1"/>
-          <p:nvPr/>
-        </p:nvSpPr>
-        <p:spPr>
-          <a:xfrm>
-            <a:off x="1344168" y="5046471"/>
-            <a:ext cx="10097719" cy="285496"/>
-          </a:xfrm>
-          <a:prstGeom prst="rect">
-            <a:avLst/>
-          </a:prstGeom>
-          <a:noFill/>
-        </p:spPr>
-        <p:txBody>
-          <a:bodyPr wrap="square" lIns="0" rIns="0" tIns="0" bIns="0" anchor="t">
-            <a:spAutoFit/>
-          </a:bodyPr>
-          <a:lstStyle/>
-          <a:p>
-            <a:pPr algn="l">
-              <a:lnSpc>
-                <a:spcPct val="140000"/>
-              </a:lnSpc>
-            </a:pPr>
-            <a:r>
-              <a:rPr sz="1400" b="0" i="0">
-                <a:solidFill>
-                  <a:srgbClr val="3A3D40"/>
-                </a:solidFill>
-                <a:latin typeface="Verdana"/>
-              </a:rPr>
-              <a:t>À quel moment demande-t-on à ajouter un point ?</a:t>
-            </a:r>
-          </a:p>
-        </p:txBody>
-      </p:sp>
-      <p:sp>
-        <p:nvSpPr>
-          <p:cNvPr id="28" name="Rounded Rectangle 27"/>
-          <p:cNvSpPr/>
-          <p:nvPr/>
-        </p:nvSpPr>
-        <p:spPr>
-          <a:xfrm>
-            <a:off x="566928" y="5578856"/>
-            <a:ext cx="11057839" cy="559816"/>
-          </a:xfrm>
-          <a:prstGeom prst="roundRect">
-            <a:avLst>
-              <a:gd name="adj" fmla="val 26134"/>
-            </a:avLst>
-          </a:prstGeom>
-          <a:solidFill>
-            <a:srgbClr val="FFFFFF"/>
-          </a:solidFill>
-          <a:ln w="12700">
-            <a:solidFill>
-              <a:srgbClr val="EAEAE8"/>
-            </a:solidFill>
-          </a:ln>
-          <a:effectLst/>
-        </p:spPr>
-        <p:style>
-          <a:lnRef idx="1">
-            <a:schemeClr val="accent1"/>
-          </a:lnRef>
-          <a:fillRef idx="3">
-            <a:schemeClr val="accent1"/>
-          </a:fillRef>
-          <a:effectRef idx="2">
-            <a:schemeClr val="accent1"/>
-          </a:effectRef>
-          <a:fontRef idx="minor">
-            <a:schemeClr val="lt1"/>
-          </a:fontRef>
-        </p:style>
-        <p:txBody>
-          <a:bodyPr rtlCol="0" anchor="ctr"/>
-          <a:lstStyle/>
-          <a:p/>
-        </p:txBody>
-      </p:sp>
-      <p:sp>
-        <p:nvSpPr>
-          <p:cNvPr id="29" name="Rounded Rectangle 28"/>
-          <p:cNvSpPr/>
-          <p:nvPr/>
-        </p:nvSpPr>
-        <p:spPr>
-          <a:xfrm>
-            <a:off x="841247" y="5675884"/>
-            <a:ext cx="365760" cy="365760"/>
-          </a:xfrm>
-          <a:prstGeom prst="roundRect">
-            <a:avLst>
-              <a:gd name="adj" fmla="val 32500"/>
-            </a:avLst>
-          </a:prstGeom>
-          <a:solidFill>
-            <a:srgbClr val="DCF2EF"/>
-          </a:solidFill>
-          <a:ln>
-            <a:noFill/>
-          </a:ln>
-          <a:effectLst/>
-        </p:spPr>
-        <p:style>
-          <a:lnRef idx="1">
-            <a:schemeClr val="accent1"/>
-          </a:lnRef>
-          <a:fillRef idx="3">
-            <a:schemeClr val="accent1"/>
-          </a:fillRef>
-          <a:effectRef idx="2">
-            <a:schemeClr val="accent1"/>
-          </a:effectRef>
-          <a:fontRef idx="minor">
-            <a:schemeClr val="lt1"/>
-          </a:fontRef>
-        </p:style>
-        <p:txBody>
-          <a:bodyPr rtlCol="0" anchor="ctr"/>
-          <a:lstStyle/>
-          <a:p/>
-        </p:txBody>
-      </p:sp>
-      <p:sp>
-        <p:nvSpPr>
-          <p:cNvPr id="30" name="TextBox 29"/>
-          <p:cNvSpPr txBox="1"/>
-          <p:nvPr/>
-        </p:nvSpPr>
-        <p:spPr>
-          <a:xfrm>
-            <a:off x="841247" y="5739892"/>
-            <a:ext cx="365760" cy="256032"/>
-          </a:xfrm>
-          <a:prstGeom prst="rect">
-            <a:avLst/>
-          </a:prstGeom>
-          <a:noFill/>
-        </p:spPr>
-        <p:txBody>
-          <a:bodyPr wrap="square" lIns="0" rIns="0" tIns="0" bIns="0" anchor="t">
-            <a:spAutoFit/>
-          </a:bodyPr>
-          <a:lstStyle/>
-          <a:p>
-            <a:pPr algn="ctr">
-              <a:lnSpc>
-                <a:spcPct val="135000"/>
-              </a:lnSpc>
-            </a:pPr>
-            <a:r>
-              <a:rPr sz="1500" b="1" i="0">
-                <a:solidFill>
-                  <a:srgbClr val="0D7A6F"/>
-                </a:solidFill>
-                <a:latin typeface="Verdana"/>
-              </a:rPr>
-              <a:t>6</a:t>
-            </a:r>
-          </a:p>
-        </p:txBody>
-      </p:sp>
-      <p:sp>
-        <p:nvSpPr>
-          <p:cNvPr id="31" name="TextBox 30"/>
-          <p:cNvSpPr txBox="1"/>
-          <p:nvPr/>
-        </p:nvSpPr>
-        <p:spPr>
-          <a:xfrm>
-            <a:off x="1344168" y="5734304"/>
-            <a:ext cx="10097719" cy="285496"/>
-          </a:xfrm>
-          <a:prstGeom prst="rect">
-            <a:avLst/>
-          </a:prstGeom>
-          <a:noFill/>
-        </p:spPr>
-        <p:txBody>
-          <a:bodyPr wrap="square" lIns="0" rIns="0" tIns="0" bIns="0" anchor="t">
-            <a:spAutoFit/>
-          </a:bodyPr>
-          <a:lstStyle/>
-          <a:p>
-            <a:pPr algn="l">
-              <a:lnSpc>
-                <a:spcPct val="140000"/>
-              </a:lnSpc>
-            </a:pPr>
-            <a:r>
-              <a:rPr sz="1400" b="0" i="0">
-                <a:solidFill>
-                  <a:srgbClr val="3A3D40"/>
-                </a:solidFill>
-                <a:latin typeface="Verdana"/>
-              </a:rPr>
-              <a:t>Qu'est-ce qu'il faut avoir lu avant d'arriver ?</a:t>
+              <a:t>Document joint : le relevé des temps d'attente de juillet et d'août, deux pages. Le procès-verbal de la réunion du 25 août est déposé pour adoption.</a:t>
             </a:r>
           </a:p>
         </p:txBody>
@@ -9384,7 +9276,7 @@
                 </a:solidFill>
                 <a:latin typeface="Verdana"/>
               </a:rPr>
-              <a:t>CORRECTION</a:t>
+              <a:t>COMPRÉHENSION</a:t>
             </a:r>
           </a:p>
         </p:txBody>
@@ -9423,7 +9315,7 @@
                 </a:solidFill>
                 <a:latin typeface="Verdana"/>
               </a:rPr>
-              <a:t>L'ordre du jour du 8 septembre</a:t>
+              <a:t>Ce que dit l'ordre du jour</a:t>
             </a:r>
           </a:p>
         </p:txBody>
@@ -9462,7 +9354,7 @@
                 </a:solidFill>
                 <a:latin typeface="Verdana"/>
               </a:rPr>
-              <a:t>Correction — on lit la réponse, on ne commente pas l'erreur.</a:t>
+              <a:t>Répondez d'après l'ordre du jour ci-dessus.</a:t>
             </a:r>
           </a:p>
         </p:txBody>
@@ -9484,7 +9376,7 @@
             </a:avLst>
           </a:prstGeom>
           <a:solidFill>
-            <a:srgbClr val="E6F5EE"/>
+            <a:srgbClr val="FFFFFF"/>
           </a:solidFill>
           <a:ln w="12700">
             <a:solidFill>
@@ -9630,16 +9522,7 @@
                 </a:solidFill>
                 <a:latin typeface="Verdana"/>
               </a:rPr>
-              <a:t>Quand la réunion a-t-elle lieu, et pendant combien de temps ?   </a:t>
-            </a:r>
-            <a:r>
-              <a:rPr sz="1400" b="1" i="0">
-                <a:solidFill>
-                  <a:srgbClr val="07734A"/>
-                </a:solidFill>
-                <a:latin typeface="Verdana"/>
-              </a:rPr>
-              <a:t>» le lundi 8 septembre, de 8 h à 9 h 15</a:t>
+              <a:t>Quand la réunion a-t-elle lieu, et pendant combien de temps ?</a:t>
             </a:r>
           </a:p>
         </p:txBody>
@@ -9661,7 +9544,7 @@
             </a:avLst>
           </a:prstGeom>
           <a:solidFill>
-            <a:srgbClr val="E6F5EE"/>
+            <a:srgbClr val="FFFFFF"/>
           </a:solidFill>
           <a:ln w="12700">
             <a:solidFill>
@@ -9807,16 +9690,7 @@
                 </a:solidFill>
                 <a:latin typeface="Verdana"/>
               </a:rPr>
-              <a:t>Qui convoque la réunion ?   </a:t>
-            </a:r>
-            <a:r>
-              <a:rPr sz="1400" b="1" i="0">
-                <a:solidFill>
-                  <a:srgbClr val="07734A"/>
-                </a:solidFill>
-                <a:latin typeface="Verdana"/>
-              </a:rPr>
-              <a:t>» Renaud Cormier, chef de production</a:t>
+              <a:t>Qui convoque la réunion ?</a:t>
             </a:r>
           </a:p>
         </p:txBody>
@@ -9838,7 +9712,7 @@
             </a:avLst>
           </a:prstGeom>
           <a:solidFill>
-            <a:srgbClr val="E6F5EE"/>
+            <a:srgbClr val="FFFFFF"/>
           </a:solidFill>
           <a:ln w="12700">
             <a:solidFill>
@@ -9984,16 +9858,7 @@
                 </a:solidFill>
                 <a:latin typeface="Verdana"/>
               </a:rPr>
-              <a:t>Combien de temps dure la présentation du point 1 ?   </a:t>
-            </a:r>
-            <a:r>
-              <a:rPr sz="1400" b="1" i="0">
-                <a:solidFill>
-                  <a:srgbClr val="07734A"/>
-                </a:solidFill>
-                <a:latin typeface="Verdana"/>
-              </a:rPr>
-              <a:t>» douze minutes, puis les questions</a:t>
+              <a:t>Combien de temps dure la présentation du point 1 ?</a:t>
             </a:r>
           </a:p>
         </p:txBody>
@@ -10015,7 +9880,7 @@
             </a:avLst>
           </a:prstGeom>
           <a:solidFill>
-            <a:srgbClr val="E6F5EE"/>
+            <a:srgbClr val="FFFFFF"/>
           </a:solidFill>
           <a:ln w="12700">
             <a:solidFill>
@@ -10161,16 +10026,7 @@
                 </a:solidFill>
                 <a:latin typeface="Verdana"/>
               </a:rPr>
-              <a:t>De quoi Thérèse Lapointe va-t-elle parler ?   </a:t>
-            </a:r>
-            <a:r>
-              <a:rPr sz="1400" b="1" i="0">
-                <a:solidFill>
-                  <a:srgbClr val="07734A"/>
-                </a:solidFill>
-                <a:latin typeface="Verdana"/>
-              </a:rPr>
-              <a:t>» du rappel de la procédure de cadenassage</a:t>
+              <a:t>De quoi Thérèse Lapointe va-t-elle parler ?</a:t>
             </a:r>
           </a:p>
         </p:txBody>
@@ -10192,7 +10048,7 @@
             </a:avLst>
           </a:prstGeom>
           <a:solidFill>
-            <a:srgbClr val="E6F5EE"/>
+            <a:srgbClr val="FFFFFF"/>
           </a:solidFill>
           <a:ln w="12700">
             <a:solidFill>
@@ -10338,16 +10194,7 @@
                 </a:solidFill>
                 <a:latin typeface="Verdana"/>
               </a:rPr>
-              <a:t>À quel moment demande-t-on à ajouter un point ?   </a:t>
-            </a:r>
-            <a:r>
-              <a:rPr sz="1400" b="1" i="0">
-                <a:solidFill>
-                  <a:srgbClr val="07734A"/>
-                </a:solidFill>
-                <a:latin typeface="Verdana"/>
-              </a:rPr>
-              <a:t>» en début de réunion, jamais pendant</a:t>
+              <a:t>À quel moment demande-t-on à ajouter un point ?</a:t>
             </a:r>
           </a:p>
         </p:txBody>
@@ -10369,7 +10216,7 @@
             </a:avLst>
           </a:prstGeom>
           <a:solidFill>
-            <a:srgbClr val="E6F5EE"/>
+            <a:srgbClr val="FFFFFF"/>
           </a:solidFill>
           <a:ln w="12700">
             <a:solidFill>
@@ -10515,16 +10362,7 @@
                 </a:solidFill>
                 <a:latin typeface="Verdana"/>
               </a:rPr>
-              <a:t>Qu'est-ce qu'il faut avoir lu avant d'arriver ?   </a:t>
-            </a:r>
-            <a:r>
-              <a:rPr sz="1400" b="1" i="0">
-                <a:solidFill>
-                  <a:srgbClr val="07734A"/>
-                </a:solidFill>
-                <a:latin typeface="Verdana"/>
-              </a:rPr>
-              <a:t>» le relevé des temps d'attente, deux pages</a:t>
+              <a:t>Qu'est-ce qu'il faut avoir lu avant d'arriver ?</a:t>
             </a:r>
           </a:p>
         </p:txBody>
@@ -10701,7 +10539,7 @@
                 </a:solidFill>
                 <a:latin typeface="Verdana"/>
               </a:rPr>
-              <a:t>ANALYSE</a:t>
+              <a:t>CORRECTION</a:t>
             </a:r>
           </a:p>
         </p:txBody>
@@ -10740,29 +10578,68 @@
                 </a:solidFill>
                 <a:latin typeface="Verdana"/>
               </a:rPr>
-              <a:t>Demander une place à l'ordre du jour</a:t>
-            </a:r>
-          </a:p>
-        </p:txBody>
-      </p:sp>
-      <p:sp>
-        <p:nvSpPr>
-          <p:cNvPr id="7" name="Rounded Rectangle 6"/>
+              <a:t>Ce que dit l'ordre du jour</a:t>
+            </a:r>
+          </a:p>
+        </p:txBody>
+      </p:sp>
+      <p:sp>
+        <p:nvSpPr>
+          <p:cNvPr id="7" name="TextBox 6"/>
+          <p:cNvSpPr txBox="1"/>
+          <p:nvPr/>
+        </p:nvSpPr>
+        <p:spPr>
+          <a:xfrm>
+            <a:off x="566928" y="1645920"/>
+            <a:ext cx="11057839" cy="329184"/>
+          </a:xfrm>
+          <a:prstGeom prst="rect">
+            <a:avLst/>
+          </a:prstGeom>
+          <a:noFill/>
+        </p:spPr>
+        <p:txBody>
+          <a:bodyPr wrap="square" lIns="0" rIns="0" tIns="0" bIns="0" anchor="t">
+            <a:spAutoFit/>
+          </a:bodyPr>
+          <a:lstStyle/>
+          <a:p>
+            <a:pPr algn="l">
+              <a:lnSpc>
+                <a:spcPct val="135000"/>
+              </a:lnSpc>
+            </a:pPr>
+            <a:r>
+              <a:rPr sz="1800" b="0" i="0">
+                <a:solidFill>
+                  <a:srgbClr val="6E7175"/>
+                </a:solidFill>
+                <a:latin typeface="Verdana"/>
+              </a:rPr>
+              <a:t>Correction — on lit la réponse, on ne commente pas l'erreur.</a:t>
+            </a:r>
+          </a:p>
+        </p:txBody>
+      </p:sp>
+      <p:sp>
+        <p:nvSpPr>
+          <p:cNvPr id="8" name="Rounded Rectangle 7"/>
           <p:cNvSpPr/>
           <p:nvPr/>
         </p:nvSpPr>
         <p:spPr>
           <a:xfrm>
-            <a:off x="566928" y="1810512"/>
-            <a:ext cx="5446623" cy="2052828"/>
+            <a:off x="566928" y="2139696"/>
+            <a:ext cx="11057839" cy="559816"/>
           </a:xfrm>
           <a:prstGeom prst="roundRect">
             <a:avLst>
-              <a:gd name="adj" fmla="val 7126"/>
+              <a:gd name="adj" fmla="val 26134"/>
             </a:avLst>
           </a:prstGeom>
           <a:solidFill>
-            <a:srgbClr val="FFFFFF"/>
+            <a:srgbClr val="E6F5EE"/>
           </a:solidFill>
           <a:ln w="12700">
             <a:solidFill>
@@ -10793,14 +10670,58 @@
       </p:sp>
       <p:sp>
         <p:nvSpPr>
-          <p:cNvPr id="8" name="TextBox 7"/>
+          <p:cNvPr id="9" name="Rounded Rectangle 8"/>
+          <p:cNvSpPr/>
+          <p:nvPr/>
+        </p:nvSpPr>
+        <p:spPr>
+          <a:xfrm>
+            <a:off x="841247" y="2236724"/>
+            <a:ext cx="365760" cy="365760"/>
+          </a:xfrm>
+          <a:prstGeom prst="roundRect">
+            <a:avLst>
+              <a:gd name="adj" fmla="val 32500"/>
+            </a:avLst>
+          </a:prstGeom>
+          <a:solidFill>
+            <a:srgbClr val="DCF2EF"/>
+          </a:solidFill>
+          <a:ln>
+            <a:noFill/>
+          </a:ln>
+          <a:effectLst/>
+        </p:spPr>
+        <p:style>
+          <a:lnRef idx="1">
+            <a:schemeClr val="accent1"/>
+          </a:lnRef>
+          <a:fillRef idx="3">
+            <a:schemeClr val="accent1"/>
+          </a:fillRef>
+          <a:effectRef idx="2">
+            <a:schemeClr val="accent1"/>
+          </a:effectRef>
+          <a:fontRef idx="minor">
+            <a:schemeClr val="lt1"/>
+          </a:fontRef>
+        </p:style>
+        <p:txBody>
+          <a:bodyPr rtlCol="0" anchor="ctr"/>
+          <a:lstStyle/>
+          <a:p/>
+        </p:txBody>
+      </p:sp>
+      <p:sp>
+        <p:nvSpPr>
+          <p:cNvPr id="10" name="TextBox 9"/>
           <p:cNvSpPr txBox="1"/>
           <p:nvPr/>
         </p:nvSpPr>
         <p:spPr>
           <a:xfrm>
-            <a:off x="886968" y="2084831"/>
-            <a:ext cx="4806543" cy="357124"/>
+            <a:off x="841247" y="2300732"/>
+            <a:ext cx="365760" cy="256032"/>
           </a:xfrm>
           <a:prstGeom prst="rect">
             <a:avLst/>
@@ -10813,33 +10734,33 @@
           </a:bodyPr>
           <a:lstStyle/>
           <a:p>
-            <a:pPr algn="l">
+            <a:pPr algn="ctr">
               <a:lnSpc>
-                <a:spcPct val="118000"/>
+                <a:spcPct val="135000"/>
               </a:lnSpc>
             </a:pPr>
             <a:r>
-              <a:rPr sz="2200" b="1" i="0">
+              <a:rPr sz="1500" b="1" i="0">
                 <a:solidFill>
                   <a:srgbClr val="0D7A6F"/>
                 </a:solidFill>
                 <a:latin typeface="Verdana"/>
               </a:rPr>
-              <a:t>1 · Demander la place d'abord</a:t>
-            </a:r>
-          </a:p>
-        </p:txBody>
-      </p:sp>
-      <p:sp>
-        <p:nvSpPr>
-          <p:cNvPr id="9" name="TextBox 8"/>
+              <a:t>1</a:t>
+            </a:r>
+          </a:p>
+        </p:txBody>
+      </p:sp>
+      <p:sp>
+        <p:nvSpPr>
+          <p:cNvPr id="11" name="TextBox 10"/>
           <p:cNvSpPr txBox="1"/>
           <p:nvPr/>
         </p:nvSpPr>
         <p:spPr>
           <a:xfrm>
-            <a:off x="886968" y="2469388"/>
-            <a:ext cx="4806543" cy="1119632"/>
+            <a:off x="1344168" y="2295144"/>
+            <a:ext cx="10097719" cy="285496"/>
           </a:xfrm>
           <a:prstGeom prst="rect">
             <a:avLst/>
@@ -10854,39 +10775,48 @@
           <a:p>
             <a:pPr algn="l">
               <a:lnSpc>
-                <a:spcPct val="142000"/>
+                <a:spcPct val="140000"/>
               </a:lnSpc>
             </a:pPr>
             <a:r>
-              <a:rPr sz="1500" b="0" i="0">
+              <a:rPr sz="1400" b="0" i="0">
                 <a:solidFill>
                   <a:srgbClr val="3A3D40"/>
                 </a:solidFill>
                 <a:latin typeface="Verdana"/>
               </a:rPr>
-              <a:t>« Est-ce qu'il reste de la place à l'ordre du jour d'une prochaine réunion ? » On demande la place avant de préparer le contenu.</a:t>
-            </a:r>
-          </a:p>
-        </p:txBody>
-      </p:sp>
-      <p:sp>
-        <p:nvSpPr>
-          <p:cNvPr id="10" name="Rounded Rectangle 9"/>
+              <a:t>Quand la réunion a-t-elle lieu, et pendant combien de temps ?   </a:t>
+            </a:r>
+            <a:r>
+              <a:rPr sz="1400" b="1" i="0">
+                <a:solidFill>
+                  <a:srgbClr val="07734A"/>
+                </a:solidFill>
+                <a:latin typeface="Verdana"/>
+              </a:rPr>
+              <a:t>» le lundi 8 septembre, de 8 h à 9 h 15</a:t>
+            </a:r>
+          </a:p>
+        </p:txBody>
+      </p:sp>
+      <p:sp>
+        <p:nvSpPr>
+          <p:cNvPr id="12" name="Rounded Rectangle 11"/>
           <p:cNvSpPr/>
           <p:nvPr/>
         </p:nvSpPr>
         <p:spPr>
           <a:xfrm>
-            <a:off x="6178143" y="1810512"/>
-            <a:ext cx="5446623" cy="2052828"/>
+            <a:off x="566928" y="2827528"/>
+            <a:ext cx="11057839" cy="559816"/>
           </a:xfrm>
           <a:prstGeom prst="roundRect">
             <a:avLst>
-              <a:gd name="adj" fmla="val 7126"/>
+              <a:gd name="adj" fmla="val 26134"/>
             </a:avLst>
           </a:prstGeom>
           <a:solidFill>
-            <a:srgbClr val="FFFFFF"/>
+            <a:srgbClr val="E6F5EE"/>
           </a:solidFill>
           <a:ln w="12700">
             <a:solidFill>
@@ -10917,14 +10847,58 @@
       </p:sp>
       <p:sp>
         <p:nvSpPr>
-          <p:cNvPr id="11" name="TextBox 10"/>
+          <p:cNvPr id="13" name="Rounded Rectangle 12"/>
+          <p:cNvSpPr/>
+          <p:nvPr/>
+        </p:nvSpPr>
+        <p:spPr>
+          <a:xfrm>
+            <a:off x="841247" y="2924556"/>
+            <a:ext cx="365760" cy="365760"/>
+          </a:xfrm>
+          <a:prstGeom prst="roundRect">
+            <a:avLst>
+              <a:gd name="adj" fmla="val 32500"/>
+            </a:avLst>
+          </a:prstGeom>
+          <a:solidFill>
+            <a:srgbClr val="DCF2EF"/>
+          </a:solidFill>
+          <a:ln>
+            <a:noFill/>
+          </a:ln>
+          <a:effectLst/>
+        </p:spPr>
+        <p:style>
+          <a:lnRef idx="1">
+            <a:schemeClr val="accent1"/>
+          </a:lnRef>
+          <a:fillRef idx="3">
+            <a:schemeClr val="accent1"/>
+          </a:fillRef>
+          <a:effectRef idx="2">
+            <a:schemeClr val="accent1"/>
+          </a:effectRef>
+          <a:fontRef idx="minor">
+            <a:schemeClr val="lt1"/>
+          </a:fontRef>
+        </p:style>
+        <p:txBody>
+          <a:bodyPr rtlCol="0" anchor="ctr"/>
+          <a:lstStyle/>
+          <a:p/>
+        </p:txBody>
+      </p:sp>
+      <p:sp>
+        <p:nvSpPr>
+          <p:cNvPr id="14" name="TextBox 13"/>
           <p:cNvSpPr txBox="1"/>
           <p:nvPr/>
         </p:nvSpPr>
         <p:spPr>
           <a:xfrm>
-            <a:off x="6498183" y="2084831"/>
-            <a:ext cx="4806543" cy="357124"/>
+            <a:off x="841247" y="2988564"/>
+            <a:ext cx="365760" cy="256032"/>
           </a:xfrm>
           <a:prstGeom prst="rect">
             <a:avLst/>
@@ -10937,33 +10911,33 @@
           </a:bodyPr>
           <a:lstStyle/>
           <a:p>
-            <a:pPr algn="l">
+            <a:pPr algn="ctr">
               <a:lnSpc>
-                <a:spcPct val="118000"/>
+                <a:spcPct val="135000"/>
               </a:lnSpc>
             </a:pPr>
             <a:r>
-              <a:rPr sz="2200" b="1" i="0">
+              <a:rPr sz="1500" b="1" i="0">
                 <a:solidFill>
                   <a:srgbClr val="0D7A6F"/>
                 </a:solidFill>
                 <a:latin typeface="Verdana"/>
               </a:rPr>
-              <a:t>2 · Dire combien de temps</a:t>
-            </a:r>
-          </a:p>
-        </p:txBody>
-      </p:sp>
-      <p:sp>
-        <p:nvSpPr>
-          <p:cNvPr id="12" name="TextBox 11"/>
+              <a:t>2</a:t>
+            </a:r>
+          </a:p>
+        </p:txBody>
+      </p:sp>
+      <p:sp>
+        <p:nvSpPr>
+          <p:cNvPr id="15" name="TextBox 14"/>
           <p:cNvSpPr txBox="1"/>
           <p:nvPr/>
         </p:nvSpPr>
         <p:spPr>
           <a:xfrm>
-            <a:off x="6498183" y="2469388"/>
-            <a:ext cx="4806543" cy="1119632"/>
+            <a:off x="1344168" y="2982975"/>
+            <a:ext cx="10097719" cy="285496"/>
           </a:xfrm>
           <a:prstGeom prst="rect">
             <a:avLst/>
@@ -10978,39 +10952,48 @@
           <a:p>
             <a:pPr algn="l">
               <a:lnSpc>
-                <a:spcPct val="142000"/>
+                <a:spcPct val="140000"/>
               </a:lnSpc>
             </a:pPr>
             <a:r>
-              <a:rPr sz="1500" b="0" i="0">
+              <a:rPr sz="1400" b="0" i="0">
                 <a:solidFill>
                   <a:srgbClr val="3A3D40"/>
                 </a:solidFill>
                 <a:latin typeface="Verdana"/>
               </a:rPr>
-              <a:t>« J'aurais besoin d'une quinzaine de minutes. » Une demande sans durée ne s'accorde pas.</a:t>
-            </a:r>
-          </a:p>
-        </p:txBody>
-      </p:sp>
-      <p:sp>
-        <p:nvSpPr>
-          <p:cNvPr id="13" name="Rounded Rectangle 12"/>
+              <a:t>Qui convoque la réunion ?   </a:t>
+            </a:r>
+            <a:r>
+              <a:rPr sz="1400" b="1" i="0">
+                <a:solidFill>
+                  <a:srgbClr val="07734A"/>
+                </a:solidFill>
+                <a:latin typeface="Verdana"/>
+              </a:rPr>
+              <a:t>» Renaud Cormier, chef de production</a:t>
+            </a:r>
+          </a:p>
+        </p:txBody>
+      </p:sp>
+      <p:sp>
+        <p:nvSpPr>
+          <p:cNvPr id="16" name="Rounded Rectangle 15"/>
           <p:cNvSpPr/>
           <p:nvPr/>
         </p:nvSpPr>
         <p:spPr>
           <a:xfrm>
-            <a:off x="566928" y="4027932"/>
-            <a:ext cx="5446623" cy="2052828"/>
+            <a:off x="566928" y="3515359"/>
+            <a:ext cx="11057839" cy="559816"/>
           </a:xfrm>
           <a:prstGeom prst="roundRect">
             <a:avLst>
-              <a:gd name="adj" fmla="val 7126"/>
+              <a:gd name="adj" fmla="val 26134"/>
             </a:avLst>
           </a:prstGeom>
           <a:solidFill>
-            <a:srgbClr val="FFFFFF"/>
+            <a:srgbClr val="E6F5EE"/>
           </a:solidFill>
           <a:ln w="12700">
             <a:solidFill>
@@ -11041,14 +11024,58 @@
       </p:sp>
       <p:sp>
         <p:nvSpPr>
-          <p:cNvPr id="14" name="TextBox 13"/>
+          <p:cNvPr id="17" name="Rounded Rectangle 16"/>
+          <p:cNvSpPr/>
+          <p:nvPr/>
+        </p:nvSpPr>
+        <p:spPr>
+          <a:xfrm>
+            <a:off x="841247" y="3612388"/>
+            <a:ext cx="365760" cy="365760"/>
+          </a:xfrm>
+          <a:prstGeom prst="roundRect">
+            <a:avLst>
+              <a:gd name="adj" fmla="val 32500"/>
+            </a:avLst>
+          </a:prstGeom>
+          <a:solidFill>
+            <a:srgbClr val="DCF2EF"/>
+          </a:solidFill>
+          <a:ln>
+            <a:noFill/>
+          </a:ln>
+          <a:effectLst/>
+        </p:spPr>
+        <p:style>
+          <a:lnRef idx="1">
+            <a:schemeClr val="accent1"/>
+          </a:lnRef>
+          <a:fillRef idx="3">
+            <a:schemeClr val="accent1"/>
+          </a:fillRef>
+          <a:effectRef idx="2">
+            <a:schemeClr val="accent1"/>
+          </a:effectRef>
+          <a:fontRef idx="minor">
+            <a:schemeClr val="lt1"/>
+          </a:fontRef>
+        </p:style>
+        <p:txBody>
+          <a:bodyPr rtlCol="0" anchor="ctr"/>
+          <a:lstStyle/>
+          <a:p/>
+        </p:txBody>
+      </p:sp>
+      <p:sp>
+        <p:nvSpPr>
+          <p:cNvPr id="18" name="TextBox 17"/>
           <p:cNvSpPr txBox="1"/>
           <p:nvPr/>
         </p:nvSpPr>
         <p:spPr>
           <a:xfrm>
-            <a:off x="886968" y="4302252"/>
-            <a:ext cx="4806543" cy="357124"/>
+            <a:off x="841247" y="3676395"/>
+            <a:ext cx="365760" cy="256032"/>
           </a:xfrm>
           <a:prstGeom prst="rect">
             <a:avLst/>
@@ -11061,33 +11088,33 @@
           </a:bodyPr>
           <a:lstStyle/>
           <a:p>
-            <a:pPr algn="l">
+            <a:pPr algn="ctr">
               <a:lnSpc>
-                <a:spcPct val="118000"/>
+                <a:spcPct val="135000"/>
               </a:lnSpc>
             </a:pPr>
             <a:r>
-              <a:rPr sz="2200" b="1" i="0">
+              <a:rPr sz="1500" b="1" i="0">
                 <a:solidFill>
                   <a:srgbClr val="0D7A6F"/>
                 </a:solidFill>
                 <a:latin typeface="Verdana"/>
               </a:rPr>
-              <a:t>3 · Confirmer par écrit</a:t>
-            </a:r>
-          </a:p>
-        </p:txBody>
-      </p:sp>
-      <p:sp>
-        <p:nvSpPr>
-          <p:cNvPr id="15" name="TextBox 14"/>
+              <a:t>3</a:t>
+            </a:r>
+          </a:p>
+        </p:txBody>
+      </p:sp>
+      <p:sp>
+        <p:nvSpPr>
+          <p:cNvPr id="19" name="TextBox 18"/>
           <p:cNvSpPr txBox="1"/>
           <p:nvPr/>
         </p:nvSpPr>
         <p:spPr>
           <a:xfrm>
-            <a:off x="886968" y="4686808"/>
-            <a:ext cx="4806543" cy="1119632"/>
+            <a:off x="1344168" y="3670807"/>
+            <a:ext cx="10097719" cy="285496"/>
           </a:xfrm>
           <a:prstGeom prst="rect">
             <a:avLst/>
@@ -11102,39 +11129,48 @@
           <a:p>
             <a:pPr algn="l">
               <a:lnSpc>
-                <a:spcPct val="142000"/>
+                <a:spcPct val="140000"/>
               </a:lnSpc>
             </a:pPr>
             <a:r>
-              <a:rPr sz="1500" b="0" i="0">
+              <a:rPr sz="1400" b="0" i="0">
                 <a:solidFill>
                   <a:srgbClr val="3A3D40"/>
                 </a:solidFill>
                 <a:latin typeface="Verdana"/>
               </a:rPr>
-              <a:t>Avant la date limite indiquée. Une place obtenue de vive voix et jamais confirmée n'existe pas.</a:t>
-            </a:r>
-          </a:p>
-        </p:txBody>
-      </p:sp>
-      <p:sp>
-        <p:nvSpPr>
-          <p:cNvPr id="16" name="Rounded Rectangle 15"/>
+              <a:t>Combien de temps dure la présentation du point 1 ?   </a:t>
+            </a:r>
+            <a:r>
+              <a:rPr sz="1400" b="1" i="0">
+                <a:solidFill>
+                  <a:srgbClr val="07734A"/>
+                </a:solidFill>
+                <a:latin typeface="Verdana"/>
+              </a:rPr>
+              <a:t>» douze minutes, puis les questions</a:t>
+            </a:r>
+          </a:p>
+        </p:txBody>
+      </p:sp>
+      <p:sp>
+        <p:nvSpPr>
+          <p:cNvPr id="20" name="Rounded Rectangle 19"/>
           <p:cNvSpPr/>
           <p:nvPr/>
         </p:nvSpPr>
         <p:spPr>
           <a:xfrm>
-            <a:off x="6178143" y="4027932"/>
-            <a:ext cx="5446623" cy="2052828"/>
+            <a:off x="566928" y="4203192"/>
+            <a:ext cx="11057839" cy="559816"/>
           </a:xfrm>
           <a:prstGeom prst="roundRect">
             <a:avLst>
-              <a:gd name="adj" fmla="val 7126"/>
+              <a:gd name="adj" fmla="val 26134"/>
             </a:avLst>
           </a:prstGeom>
           <a:solidFill>
-            <a:srgbClr val="FFFFFF"/>
+            <a:srgbClr val="E6F5EE"/>
           </a:solidFill>
           <a:ln w="12700">
             <a:solidFill>
@@ -11165,14 +11201,58 @@
       </p:sp>
       <p:sp>
         <p:nvSpPr>
-          <p:cNvPr id="17" name="TextBox 16"/>
+          <p:cNvPr id="21" name="Rounded Rectangle 20"/>
+          <p:cNvSpPr/>
+          <p:nvPr/>
+        </p:nvSpPr>
+        <p:spPr>
+          <a:xfrm>
+            <a:off x="841247" y="4300220"/>
+            <a:ext cx="365760" cy="365760"/>
+          </a:xfrm>
+          <a:prstGeom prst="roundRect">
+            <a:avLst>
+              <a:gd name="adj" fmla="val 32500"/>
+            </a:avLst>
+          </a:prstGeom>
+          <a:solidFill>
+            <a:srgbClr val="DCF2EF"/>
+          </a:solidFill>
+          <a:ln>
+            <a:noFill/>
+          </a:ln>
+          <a:effectLst/>
+        </p:spPr>
+        <p:style>
+          <a:lnRef idx="1">
+            <a:schemeClr val="accent1"/>
+          </a:lnRef>
+          <a:fillRef idx="3">
+            <a:schemeClr val="accent1"/>
+          </a:fillRef>
+          <a:effectRef idx="2">
+            <a:schemeClr val="accent1"/>
+          </a:effectRef>
+          <a:fontRef idx="minor">
+            <a:schemeClr val="lt1"/>
+          </a:fontRef>
+        </p:style>
+        <p:txBody>
+          <a:bodyPr rtlCol="0" anchor="ctr"/>
+          <a:lstStyle/>
+          <a:p/>
+        </p:txBody>
+      </p:sp>
+      <p:sp>
+        <p:nvSpPr>
+          <p:cNvPr id="22" name="TextBox 21"/>
           <p:cNvSpPr txBox="1"/>
           <p:nvPr/>
         </p:nvSpPr>
         <p:spPr>
           <a:xfrm>
-            <a:off x="6498183" y="4302252"/>
-            <a:ext cx="4806543" cy="357124"/>
+            <a:off x="841247" y="4364228"/>
+            <a:ext cx="365760" cy="256032"/>
           </a:xfrm>
           <a:prstGeom prst="rect">
             <a:avLst/>
@@ -11185,33 +11265,33 @@
           </a:bodyPr>
           <a:lstStyle/>
           <a:p>
-            <a:pPr algn="l">
+            <a:pPr algn="ctr">
               <a:lnSpc>
-                <a:spcPct val="118000"/>
+                <a:spcPct val="135000"/>
               </a:lnSpc>
             </a:pPr>
             <a:r>
-              <a:rPr sz="2200" b="1" i="0">
+              <a:rPr sz="1500" b="1" i="0">
                 <a:solidFill>
                   <a:srgbClr val="0D7A6F"/>
                 </a:solidFill>
                 <a:latin typeface="Verdana"/>
               </a:rPr>
-              <a:t>4 · Tenir sa durée</a:t>
-            </a:r>
-          </a:p>
-        </p:txBody>
-      </p:sp>
-      <p:sp>
-        <p:nvSpPr>
-          <p:cNvPr id="18" name="TextBox 17"/>
+              <a:t>4</a:t>
+            </a:r>
+          </a:p>
+        </p:txBody>
+      </p:sp>
+      <p:sp>
+        <p:nvSpPr>
+          <p:cNvPr id="23" name="TextBox 22"/>
           <p:cNvSpPr txBox="1"/>
           <p:nvPr/>
         </p:nvSpPr>
         <p:spPr>
           <a:xfrm>
-            <a:off x="6498183" y="4686808"/>
-            <a:ext cx="4806543" cy="1119632"/>
+            <a:off x="1344168" y="4358640"/>
+            <a:ext cx="10097719" cy="285496"/>
           </a:xfrm>
           <a:prstGeom prst="rect">
             <a:avLst/>
@@ -11226,17 +11306,380 @@
           <a:p>
             <a:pPr algn="l">
               <a:lnSpc>
-                <a:spcPct val="142000"/>
+                <a:spcPct val="140000"/>
               </a:lnSpc>
             </a:pPr>
             <a:r>
-              <a:rPr sz="1500" b="0" i="0">
+              <a:rPr sz="1400" b="0" i="0">
                 <a:solidFill>
                   <a:srgbClr val="3A3D40"/>
                 </a:solidFill>
                 <a:latin typeface="Verdana"/>
               </a:rPr>
-              <a:t>Demander quinze minutes et en prendre vingt-cinq est la façon la plus sûre de ne plus jamais en obtenir.</a:t>
+              <a:t>De quoi Thérèse Lapointe va-t-elle parler ?   </a:t>
+            </a:r>
+            <a:r>
+              <a:rPr sz="1400" b="1" i="0">
+                <a:solidFill>
+                  <a:srgbClr val="07734A"/>
+                </a:solidFill>
+                <a:latin typeface="Verdana"/>
+              </a:rPr>
+              <a:t>» du rappel de la procédure de cadenassage</a:t>
+            </a:r>
+          </a:p>
+        </p:txBody>
+      </p:sp>
+      <p:sp>
+        <p:nvSpPr>
+          <p:cNvPr id="24" name="Rounded Rectangle 23"/>
+          <p:cNvSpPr/>
+          <p:nvPr/>
+        </p:nvSpPr>
+        <p:spPr>
+          <a:xfrm>
+            <a:off x="566928" y="4891023"/>
+            <a:ext cx="11057839" cy="559816"/>
+          </a:xfrm>
+          <a:prstGeom prst="roundRect">
+            <a:avLst>
+              <a:gd name="adj" fmla="val 26134"/>
+            </a:avLst>
+          </a:prstGeom>
+          <a:solidFill>
+            <a:srgbClr val="E6F5EE"/>
+          </a:solidFill>
+          <a:ln w="12700">
+            <a:solidFill>
+              <a:srgbClr val="EAEAE8"/>
+            </a:solidFill>
+          </a:ln>
+          <a:effectLst/>
+        </p:spPr>
+        <p:style>
+          <a:lnRef idx="1">
+            <a:schemeClr val="accent1"/>
+          </a:lnRef>
+          <a:fillRef idx="3">
+            <a:schemeClr val="accent1"/>
+          </a:fillRef>
+          <a:effectRef idx="2">
+            <a:schemeClr val="accent1"/>
+          </a:effectRef>
+          <a:fontRef idx="minor">
+            <a:schemeClr val="lt1"/>
+          </a:fontRef>
+        </p:style>
+        <p:txBody>
+          <a:bodyPr rtlCol="0" anchor="ctr"/>
+          <a:lstStyle/>
+          <a:p/>
+        </p:txBody>
+      </p:sp>
+      <p:sp>
+        <p:nvSpPr>
+          <p:cNvPr id="25" name="Rounded Rectangle 24"/>
+          <p:cNvSpPr/>
+          <p:nvPr/>
+        </p:nvSpPr>
+        <p:spPr>
+          <a:xfrm>
+            <a:off x="841247" y="4988051"/>
+            <a:ext cx="365760" cy="365760"/>
+          </a:xfrm>
+          <a:prstGeom prst="roundRect">
+            <a:avLst>
+              <a:gd name="adj" fmla="val 32500"/>
+            </a:avLst>
+          </a:prstGeom>
+          <a:solidFill>
+            <a:srgbClr val="DCF2EF"/>
+          </a:solidFill>
+          <a:ln>
+            <a:noFill/>
+          </a:ln>
+          <a:effectLst/>
+        </p:spPr>
+        <p:style>
+          <a:lnRef idx="1">
+            <a:schemeClr val="accent1"/>
+          </a:lnRef>
+          <a:fillRef idx="3">
+            <a:schemeClr val="accent1"/>
+          </a:fillRef>
+          <a:effectRef idx="2">
+            <a:schemeClr val="accent1"/>
+          </a:effectRef>
+          <a:fontRef idx="minor">
+            <a:schemeClr val="lt1"/>
+          </a:fontRef>
+        </p:style>
+        <p:txBody>
+          <a:bodyPr rtlCol="0" anchor="ctr"/>
+          <a:lstStyle/>
+          <a:p/>
+        </p:txBody>
+      </p:sp>
+      <p:sp>
+        <p:nvSpPr>
+          <p:cNvPr id="26" name="TextBox 25"/>
+          <p:cNvSpPr txBox="1"/>
+          <p:nvPr/>
+        </p:nvSpPr>
+        <p:spPr>
+          <a:xfrm>
+            <a:off x="841247" y="5052059"/>
+            <a:ext cx="365760" cy="256032"/>
+          </a:xfrm>
+          <a:prstGeom prst="rect">
+            <a:avLst/>
+          </a:prstGeom>
+          <a:noFill/>
+        </p:spPr>
+        <p:txBody>
+          <a:bodyPr wrap="square" lIns="0" rIns="0" tIns="0" bIns="0" anchor="t">
+            <a:spAutoFit/>
+          </a:bodyPr>
+          <a:lstStyle/>
+          <a:p>
+            <a:pPr algn="ctr">
+              <a:lnSpc>
+                <a:spcPct val="135000"/>
+              </a:lnSpc>
+            </a:pPr>
+            <a:r>
+              <a:rPr sz="1500" b="1" i="0">
+                <a:solidFill>
+                  <a:srgbClr val="0D7A6F"/>
+                </a:solidFill>
+                <a:latin typeface="Verdana"/>
+              </a:rPr>
+              <a:t>5</a:t>
+            </a:r>
+          </a:p>
+        </p:txBody>
+      </p:sp>
+      <p:sp>
+        <p:nvSpPr>
+          <p:cNvPr id="27" name="TextBox 26"/>
+          <p:cNvSpPr txBox="1"/>
+          <p:nvPr/>
+        </p:nvSpPr>
+        <p:spPr>
+          <a:xfrm>
+            <a:off x="1344168" y="5046471"/>
+            <a:ext cx="10097719" cy="285496"/>
+          </a:xfrm>
+          <a:prstGeom prst="rect">
+            <a:avLst/>
+          </a:prstGeom>
+          <a:noFill/>
+        </p:spPr>
+        <p:txBody>
+          <a:bodyPr wrap="square" lIns="0" rIns="0" tIns="0" bIns="0" anchor="t">
+            <a:spAutoFit/>
+          </a:bodyPr>
+          <a:lstStyle/>
+          <a:p>
+            <a:pPr algn="l">
+              <a:lnSpc>
+                <a:spcPct val="140000"/>
+              </a:lnSpc>
+            </a:pPr>
+            <a:r>
+              <a:rPr sz="1400" b="0" i="0">
+                <a:solidFill>
+                  <a:srgbClr val="3A3D40"/>
+                </a:solidFill>
+                <a:latin typeface="Verdana"/>
+              </a:rPr>
+              <a:t>À quel moment demande-t-on à ajouter un point ?   </a:t>
+            </a:r>
+            <a:r>
+              <a:rPr sz="1400" b="1" i="0">
+                <a:solidFill>
+                  <a:srgbClr val="07734A"/>
+                </a:solidFill>
+                <a:latin typeface="Verdana"/>
+              </a:rPr>
+              <a:t>» en début de réunion, jamais pendant</a:t>
+            </a:r>
+          </a:p>
+        </p:txBody>
+      </p:sp>
+      <p:sp>
+        <p:nvSpPr>
+          <p:cNvPr id="28" name="Rounded Rectangle 27"/>
+          <p:cNvSpPr/>
+          <p:nvPr/>
+        </p:nvSpPr>
+        <p:spPr>
+          <a:xfrm>
+            <a:off x="566928" y="5578856"/>
+            <a:ext cx="11057839" cy="559816"/>
+          </a:xfrm>
+          <a:prstGeom prst="roundRect">
+            <a:avLst>
+              <a:gd name="adj" fmla="val 26134"/>
+            </a:avLst>
+          </a:prstGeom>
+          <a:solidFill>
+            <a:srgbClr val="E6F5EE"/>
+          </a:solidFill>
+          <a:ln w="12700">
+            <a:solidFill>
+              <a:srgbClr val="EAEAE8"/>
+            </a:solidFill>
+          </a:ln>
+          <a:effectLst/>
+        </p:spPr>
+        <p:style>
+          <a:lnRef idx="1">
+            <a:schemeClr val="accent1"/>
+          </a:lnRef>
+          <a:fillRef idx="3">
+            <a:schemeClr val="accent1"/>
+          </a:fillRef>
+          <a:effectRef idx="2">
+            <a:schemeClr val="accent1"/>
+          </a:effectRef>
+          <a:fontRef idx="minor">
+            <a:schemeClr val="lt1"/>
+          </a:fontRef>
+        </p:style>
+        <p:txBody>
+          <a:bodyPr rtlCol="0" anchor="ctr"/>
+          <a:lstStyle/>
+          <a:p/>
+        </p:txBody>
+      </p:sp>
+      <p:sp>
+        <p:nvSpPr>
+          <p:cNvPr id="29" name="Rounded Rectangle 28"/>
+          <p:cNvSpPr/>
+          <p:nvPr/>
+        </p:nvSpPr>
+        <p:spPr>
+          <a:xfrm>
+            <a:off x="841247" y="5675884"/>
+            <a:ext cx="365760" cy="365760"/>
+          </a:xfrm>
+          <a:prstGeom prst="roundRect">
+            <a:avLst>
+              <a:gd name="adj" fmla="val 32500"/>
+            </a:avLst>
+          </a:prstGeom>
+          <a:solidFill>
+            <a:srgbClr val="DCF2EF"/>
+          </a:solidFill>
+          <a:ln>
+            <a:noFill/>
+          </a:ln>
+          <a:effectLst/>
+        </p:spPr>
+        <p:style>
+          <a:lnRef idx="1">
+            <a:schemeClr val="accent1"/>
+          </a:lnRef>
+          <a:fillRef idx="3">
+            <a:schemeClr val="accent1"/>
+          </a:fillRef>
+          <a:effectRef idx="2">
+            <a:schemeClr val="accent1"/>
+          </a:effectRef>
+          <a:fontRef idx="minor">
+            <a:schemeClr val="lt1"/>
+          </a:fontRef>
+        </p:style>
+        <p:txBody>
+          <a:bodyPr rtlCol="0" anchor="ctr"/>
+          <a:lstStyle/>
+          <a:p/>
+        </p:txBody>
+      </p:sp>
+      <p:sp>
+        <p:nvSpPr>
+          <p:cNvPr id="30" name="TextBox 29"/>
+          <p:cNvSpPr txBox="1"/>
+          <p:nvPr/>
+        </p:nvSpPr>
+        <p:spPr>
+          <a:xfrm>
+            <a:off x="841247" y="5739892"/>
+            <a:ext cx="365760" cy="256032"/>
+          </a:xfrm>
+          <a:prstGeom prst="rect">
+            <a:avLst/>
+          </a:prstGeom>
+          <a:noFill/>
+        </p:spPr>
+        <p:txBody>
+          <a:bodyPr wrap="square" lIns="0" rIns="0" tIns="0" bIns="0" anchor="t">
+            <a:spAutoFit/>
+          </a:bodyPr>
+          <a:lstStyle/>
+          <a:p>
+            <a:pPr algn="ctr">
+              <a:lnSpc>
+                <a:spcPct val="135000"/>
+              </a:lnSpc>
+            </a:pPr>
+            <a:r>
+              <a:rPr sz="1500" b="1" i="0">
+                <a:solidFill>
+                  <a:srgbClr val="0D7A6F"/>
+                </a:solidFill>
+                <a:latin typeface="Verdana"/>
+              </a:rPr>
+              <a:t>6</a:t>
+            </a:r>
+          </a:p>
+        </p:txBody>
+      </p:sp>
+      <p:sp>
+        <p:nvSpPr>
+          <p:cNvPr id="31" name="TextBox 30"/>
+          <p:cNvSpPr txBox="1"/>
+          <p:nvPr/>
+        </p:nvSpPr>
+        <p:spPr>
+          <a:xfrm>
+            <a:off x="1344168" y="5734304"/>
+            <a:ext cx="10097719" cy="285496"/>
+          </a:xfrm>
+          <a:prstGeom prst="rect">
+            <a:avLst/>
+          </a:prstGeom>
+          <a:noFill/>
+        </p:spPr>
+        <p:txBody>
+          <a:bodyPr wrap="square" lIns="0" rIns="0" tIns="0" bIns="0" anchor="t">
+            <a:spAutoFit/>
+          </a:bodyPr>
+          <a:lstStyle/>
+          <a:p>
+            <a:pPr algn="l">
+              <a:lnSpc>
+                <a:spcPct val="140000"/>
+              </a:lnSpc>
+            </a:pPr>
+            <a:r>
+              <a:rPr sz="1400" b="0" i="0">
+                <a:solidFill>
+                  <a:srgbClr val="3A3D40"/>
+                </a:solidFill>
+                <a:latin typeface="Verdana"/>
+              </a:rPr>
+              <a:t>Qu'est-ce qu'il faut avoir lu avant d'arriver ?   </a:t>
+            </a:r>
+            <a:r>
+              <a:rPr sz="1400" b="1" i="0">
+                <a:solidFill>
+                  <a:srgbClr val="07734A"/>
+                </a:solidFill>
+                <a:latin typeface="Verdana"/>
+              </a:rPr>
+              <a:t>» le relevé des temps d'attente, deux pages</a:t>
             </a:r>
           </a:p>
         </p:txBody>
@@ -11413,7 +11856,7 @@
                 </a:solidFill>
                 <a:latin typeface="Verdana"/>
               </a:rPr>
-              <a:t>LECTURE</a:t>
+              <a:t>ANALYSE</a:t>
             </a:r>
           </a:p>
         </p:txBody>
@@ -11452,7 +11895,7 @@
                 </a:solidFill>
                 <a:latin typeface="Verdana"/>
               </a:rPr>
-              <a:t>Le piège le plus fréquent</a:t>
+              <a:t>Demander une place à l'ordre du jour</a:t>
             </a:r>
           </a:p>
         </p:txBody>
@@ -11465,260 +11908,12 @@
         </p:nvSpPr>
         <p:spPr>
           <a:xfrm>
-            <a:off x="566928" y="1856232"/>
-            <a:ext cx="5428335" cy="2331720"/>
+            <a:off x="566928" y="1810512"/>
+            <a:ext cx="5446623" cy="2052828"/>
           </a:xfrm>
           <a:prstGeom prst="roundRect">
             <a:avLst>
-              <a:gd name="adj" fmla="val 6274"/>
-            </a:avLst>
-          </a:prstGeom>
-          <a:solidFill>
-            <a:srgbClr val="FFF6F5"/>
-          </a:solidFill>
-          <a:ln w="12700">
-            <a:solidFill>
-              <a:srgbClr val="DC2626"/>
-            </a:solidFill>
-          </a:ln>
-          <a:effectLst/>
-        </p:spPr>
-        <p:style>
-          <a:lnRef idx="1">
-            <a:schemeClr val="accent1"/>
-          </a:lnRef>
-          <a:fillRef idx="3">
-            <a:schemeClr val="accent1"/>
-          </a:fillRef>
-          <a:effectRef idx="2">
-            <a:schemeClr val="accent1"/>
-          </a:effectRef>
-          <a:fontRef idx="minor">
-            <a:schemeClr val="lt1"/>
-          </a:fontRef>
-        </p:style>
-        <p:txBody>
-          <a:bodyPr rtlCol="0" anchor="ctr"/>
-          <a:lstStyle/>
-          <a:p/>
-        </p:txBody>
-      </p:sp>
-      <p:sp>
-        <p:nvSpPr>
-          <p:cNvPr id="8" name="TextBox 7"/>
-          <p:cNvSpPr txBox="1"/>
-          <p:nvPr/>
-        </p:nvSpPr>
-        <p:spPr>
-          <a:xfrm>
-            <a:off x="932688" y="2130552"/>
-            <a:ext cx="4696815" cy="274320"/>
-          </a:xfrm>
-          <a:prstGeom prst="rect">
-            <a:avLst/>
-          </a:prstGeom>
-          <a:noFill/>
-        </p:spPr>
-        <p:txBody>
-          <a:bodyPr wrap="square" lIns="0" rIns="0" tIns="0" bIns="0" anchor="t">
-            <a:spAutoFit/>
-          </a:bodyPr>
-          <a:lstStyle/>
-          <a:p>
-            <a:pPr algn="l">
-              <a:lnSpc>
-                <a:spcPct val="135000"/>
-              </a:lnSpc>
-            </a:pPr>
-            <a:r>
-              <a:rPr sz="1300" b="1" i="0" spc="156">
-                <a:solidFill>
-                  <a:srgbClr val="B91C1C"/>
-                </a:solidFill>
-                <a:latin typeface="Verdana"/>
-              </a:rPr>
-              <a:t>ON ENTEND SOUVENT</a:t>
-            </a:r>
-          </a:p>
-        </p:txBody>
-      </p:sp>
-      <p:sp>
-        <p:nvSpPr>
-          <p:cNvPr id="9" name="TextBox 8"/>
-          <p:cNvSpPr txBox="1"/>
-          <p:nvPr/>
-        </p:nvSpPr>
-        <p:spPr>
-          <a:xfrm>
-            <a:off x="932688" y="2569464"/>
-            <a:ext cx="4696815" cy="1417320"/>
-          </a:xfrm>
-          <a:prstGeom prst="rect">
-            <a:avLst/>
-          </a:prstGeom>
-          <a:noFill/>
-        </p:spPr>
-        <p:txBody>
-          <a:bodyPr wrap="square" lIns="0" rIns="0" tIns="0" bIns="0" anchor="t">
-            <a:spAutoFit/>
-          </a:bodyPr>
-          <a:lstStyle/>
-          <a:p>
-            <a:pPr algn="l">
-              <a:lnSpc>
-                <a:spcPct val="130000"/>
-              </a:lnSpc>
-            </a:pPr>
-            <a:r>
-              <a:rPr sz="2500" b="1" i="0">
-                <a:solidFill>
-                  <a:srgbClr val="17181A"/>
-                </a:solidFill>
-                <a:latin typeface="Verdana"/>
-              </a:rPr>
-              <a:t>arriver sans avoir lu le document joint</a:t>
-            </a:r>
-          </a:p>
-        </p:txBody>
-      </p:sp>
-      <p:sp>
-        <p:nvSpPr>
-          <p:cNvPr id="10" name="Rounded Rectangle 9"/>
-          <p:cNvSpPr/>
-          <p:nvPr/>
-        </p:nvSpPr>
-        <p:spPr>
-          <a:xfrm>
-            <a:off x="6196431" y="1856232"/>
-            <a:ext cx="5428335" cy="2331720"/>
-          </a:xfrm>
-          <a:prstGeom prst="roundRect">
-            <a:avLst>
-              <a:gd name="adj" fmla="val 6274"/>
-            </a:avLst>
-          </a:prstGeom>
-          <a:solidFill>
-            <a:srgbClr val="E6F5EE"/>
-          </a:solidFill>
-          <a:ln w="12700">
-            <a:solidFill>
-              <a:srgbClr val="0A8F5B"/>
-            </a:solidFill>
-          </a:ln>
-          <a:effectLst/>
-        </p:spPr>
-        <p:style>
-          <a:lnRef idx="1">
-            <a:schemeClr val="accent1"/>
-          </a:lnRef>
-          <a:fillRef idx="3">
-            <a:schemeClr val="accent1"/>
-          </a:fillRef>
-          <a:effectRef idx="2">
-            <a:schemeClr val="accent1"/>
-          </a:effectRef>
-          <a:fontRef idx="minor">
-            <a:schemeClr val="lt1"/>
-          </a:fontRef>
-        </p:style>
-        <p:txBody>
-          <a:bodyPr rtlCol="0" anchor="ctr"/>
-          <a:lstStyle/>
-          <a:p/>
-        </p:txBody>
-      </p:sp>
-      <p:sp>
-        <p:nvSpPr>
-          <p:cNvPr id="11" name="TextBox 10"/>
-          <p:cNvSpPr txBox="1"/>
-          <p:nvPr/>
-        </p:nvSpPr>
-        <p:spPr>
-          <a:xfrm>
-            <a:off x="6562191" y="2130552"/>
-            <a:ext cx="4696815" cy="274320"/>
-          </a:xfrm>
-          <a:prstGeom prst="rect">
-            <a:avLst/>
-          </a:prstGeom>
-          <a:noFill/>
-        </p:spPr>
-        <p:txBody>
-          <a:bodyPr wrap="square" lIns="0" rIns="0" tIns="0" bIns="0" anchor="t">
-            <a:spAutoFit/>
-          </a:bodyPr>
-          <a:lstStyle/>
-          <a:p>
-            <a:pPr algn="l">
-              <a:lnSpc>
-                <a:spcPct val="135000"/>
-              </a:lnSpc>
-            </a:pPr>
-            <a:r>
-              <a:rPr sz="1300" b="1" i="0" spc="156">
-                <a:solidFill>
-                  <a:srgbClr val="07734A"/>
-                </a:solidFill>
-                <a:latin typeface="Verdana"/>
-              </a:rPr>
-              <a:t>IL FAUT DIRE PLUTÔT</a:t>
-            </a:r>
-          </a:p>
-        </p:txBody>
-      </p:sp>
-      <p:sp>
-        <p:nvSpPr>
-          <p:cNvPr id="12" name="TextBox 11"/>
-          <p:cNvSpPr txBox="1"/>
-          <p:nvPr/>
-        </p:nvSpPr>
-        <p:spPr>
-          <a:xfrm>
-            <a:off x="6562191" y="2569464"/>
-            <a:ext cx="4696815" cy="1417320"/>
-          </a:xfrm>
-          <a:prstGeom prst="rect">
-            <a:avLst/>
-          </a:prstGeom>
-          <a:noFill/>
-        </p:spPr>
-        <p:txBody>
-          <a:bodyPr wrap="square" lIns="0" rIns="0" tIns="0" bIns="0" anchor="t">
-            <a:spAutoFit/>
-          </a:bodyPr>
-          <a:lstStyle/>
-          <a:p>
-            <a:pPr algn="l">
-              <a:lnSpc>
-                <a:spcPct val="130000"/>
-              </a:lnSpc>
-            </a:pPr>
-            <a:r>
-              <a:rPr sz="2500" b="1" i="0">
-                <a:solidFill>
-                  <a:srgbClr val="17181A"/>
-                </a:solidFill>
-                <a:latin typeface="Verdana"/>
-              </a:rPr>
-              <a:t>le lire la veille, crayon en main</a:t>
-            </a:r>
-          </a:p>
-        </p:txBody>
-      </p:sp>
-      <p:sp>
-        <p:nvSpPr>
-          <p:cNvPr id="13" name="Rounded Rectangle 12"/>
-          <p:cNvSpPr/>
-          <p:nvPr/>
-        </p:nvSpPr>
-        <p:spPr>
-          <a:xfrm>
-            <a:off x="566928" y="4462272"/>
-            <a:ext cx="11057839" cy="1618487"/>
-          </a:xfrm>
-          <a:prstGeom prst="roundRect">
-            <a:avLst>
-              <a:gd name="adj" fmla="val 9039"/>
+              <a:gd name="adj" fmla="val 7126"/>
             </a:avLst>
           </a:prstGeom>
           <a:solidFill>
@@ -11753,14 +11948,14 @@
       </p:sp>
       <p:sp>
         <p:nvSpPr>
-          <p:cNvPr id="14" name="TextBox 13"/>
+          <p:cNvPr id="8" name="TextBox 7"/>
           <p:cNvSpPr txBox="1"/>
           <p:nvPr/>
         </p:nvSpPr>
         <p:spPr>
           <a:xfrm>
-            <a:off x="969264" y="4736592"/>
-            <a:ext cx="10234879" cy="1518920"/>
+            <a:off x="886968" y="2084831"/>
+            <a:ext cx="4806543" cy="357124"/>
           </a:xfrm>
           <a:prstGeom prst="rect">
             <a:avLst/>
@@ -11775,17 +11970,428 @@
           <a:p>
             <a:pPr algn="l">
               <a:lnSpc>
-                <a:spcPct val="145000"/>
+                <a:spcPct val="118000"/>
               </a:lnSpc>
             </a:pPr>
             <a:r>
-              <a:rPr sz="2000" b="0" i="0">
-                <a:solidFill>
-                  <a:srgbClr val="4B4F52"/>
+              <a:rPr sz="2200" b="1" i="0">
+                <a:solidFill>
+                  <a:srgbClr val="0D7A6F"/>
                 </a:solidFill>
                 <a:latin typeface="Verdana"/>
               </a:rPr>
-              <a:t>Le document joint est la seule partie de la réunion que vous pouvez maîtriser d'avance. C'est aussi ce qui vous permet de poser une question précise plutôt qu'une question générale - et une question précise est ce qui fait qu'on vous écoute la fois suivante.</a:t>
+              <a:t>1 · Demander la place d'abord</a:t>
+            </a:r>
+          </a:p>
+        </p:txBody>
+      </p:sp>
+      <p:sp>
+        <p:nvSpPr>
+          <p:cNvPr id="9" name="TextBox 8"/>
+          <p:cNvSpPr txBox="1"/>
+          <p:nvPr/>
+        </p:nvSpPr>
+        <p:spPr>
+          <a:xfrm>
+            <a:off x="886968" y="2469388"/>
+            <a:ext cx="4806543" cy="1119632"/>
+          </a:xfrm>
+          <a:prstGeom prst="rect">
+            <a:avLst/>
+          </a:prstGeom>
+          <a:noFill/>
+        </p:spPr>
+        <p:txBody>
+          <a:bodyPr wrap="square" lIns="0" rIns="0" tIns="0" bIns="0" anchor="t">
+            <a:spAutoFit/>
+          </a:bodyPr>
+          <a:lstStyle/>
+          <a:p>
+            <a:pPr algn="l">
+              <a:lnSpc>
+                <a:spcPct val="142000"/>
+              </a:lnSpc>
+            </a:pPr>
+            <a:r>
+              <a:rPr sz="1500" b="0" i="0">
+                <a:solidFill>
+                  <a:srgbClr val="3A3D40"/>
+                </a:solidFill>
+                <a:latin typeface="Verdana"/>
+              </a:rPr>
+              <a:t>« Est-ce qu'il reste de la place à l'ordre du jour d'une prochaine réunion ? » On demande la place avant de préparer le contenu.</a:t>
+            </a:r>
+          </a:p>
+        </p:txBody>
+      </p:sp>
+      <p:sp>
+        <p:nvSpPr>
+          <p:cNvPr id="10" name="Rounded Rectangle 9"/>
+          <p:cNvSpPr/>
+          <p:nvPr/>
+        </p:nvSpPr>
+        <p:spPr>
+          <a:xfrm>
+            <a:off x="6178143" y="1810512"/>
+            <a:ext cx="5446623" cy="2052828"/>
+          </a:xfrm>
+          <a:prstGeom prst="roundRect">
+            <a:avLst>
+              <a:gd name="adj" fmla="val 7126"/>
+            </a:avLst>
+          </a:prstGeom>
+          <a:solidFill>
+            <a:srgbClr val="FFFFFF"/>
+          </a:solidFill>
+          <a:ln w="12700">
+            <a:solidFill>
+              <a:srgbClr val="EAEAE8"/>
+            </a:solidFill>
+          </a:ln>
+          <a:effectLst/>
+        </p:spPr>
+        <p:style>
+          <a:lnRef idx="1">
+            <a:schemeClr val="accent1"/>
+          </a:lnRef>
+          <a:fillRef idx="3">
+            <a:schemeClr val="accent1"/>
+          </a:fillRef>
+          <a:effectRef idx="2">
+            <a:schemeClr val="accent1"/>
+          </a:effectRef>
+          <a:fontRef idx="minor">
+            <a:schemeClr val="lt1"/>
+          </a:fontRef>
+        </p:style>
+        <p:txBody>
+          <a:bodyPr rtlCol="0" anchor="ctr"/>
+          <a:lstStyle/>
+          <a:p/>
+        </p:txBody>
+      </p:sp>
+      <p:sp>
+        <p:nvSpPr>
+          <p:cNvPr id="11" name="TextBox 10"/>
+          <p:cNvSpPr txBox="1"/>
+          <p:nvPr/>
+        </p:nvSpPr>
+        <p:spPr>
+          <a:xfrm>
+            <a:off x="6498183" y="2084831"/>
+            <a:ext cx="4806543" cy="357124"/>
+          </a:xfrm>
+          <a:prstGeom prst="rect">
+            <a:avLst/>
+          </a:prstGeom>
+          <a:noFill/>
+        </p:spPr>
+        <p:txBody>
+          <a:bodyPr wrap="square" lIns="0" rIns="0" tIns="0" bIns="0" anchor="t">
+            <a:spAutoFit/>
+          </a:bodyPr>
+          <a:lstStyle/>
+          <a:p>
+            <a:pPr algn="l">
+              <a:lnSpc>
+                <a:spcPct val="118000"/>
+              </a:lnSpc>
+            </a:pPr>
+            <a:r>
+              <a:rPr sz="2200" b="1" i="0">
+                <a:solidFill>
+                  <a:srgbClr val="0D7A6F"/>
+                </a:solidFill>
+                <a:latin typeface="Verdana"/>
+              </a:rPr>
+              <a:t>2 · Dire combien de temps</a:t>
+            </a:r>
+          </a:p>
+        </p:txBody>
+      </p:sp>
+      <p:sp>
+        <p:nvSpPr>
+          <p:cNvPr id="12" name="TextBox 11"/>
+          <p:cNvSpPr txBox="1"/>
+          <p:nvPr/>
+        </p:nvSpPr>
+        <p:spPr>
+          <a:xfrm>
+            <a:off x="6498183" y="2469388"/>
+            <a:ext cx="4806543" cy="1119632"/>
+          </a:xfrm>
+          <a:prstGeom prst="rect">
+            <a:avLst/>
+          </a:prstGeom>
+          <a:noFill/>
+        </p:spPr>
+        <p:txBody>
+          <a:bodyPr wrap="square" lIns="0" rIns="0" tIns="0" bIns="0" anchor="t">
+            <a:spAutoFit/>
+          </a:bodyPr>
+          <a:lstStyle/>
+          <a:p>
+            <a:pPr algn="l">
+              <a:lnSpc>
+                <a:spcPct val="142000"/>
+              </a:lnSpc>
+            </a:pPr>
+            <a:r>
+              <a:rPr sz="1500" b="0" i="0">
+                <a:solidFill>
+                  <a:srgbClr val="3A3D40"/>
+                </a:solidFill>
+                <a:latin typeface="Verdana"/>
+              </a:rPr>
+              <a:t>« J'aurais besoin d'une quinzaine de minutes. » Une demande sans durée ne s'accorde pas.</a:t>
+            </a:r>
+          </a:p>
+        </p:txBody>
+      </p:sp>
+      <p:sp>
+        <p:nvSpPr>
+          <p:cNvPr id="13" name="Rounded Rectangle 12"/>
+          <p:cNvSpPr/>
+          <p:nvPr/>
+        </p:nvSpPr>
+        <p:spPr>
+          <a:xfrm>
+            <a:off x="566928" y="4027932"/>
+            <a:ext cx="5446623" cy="2052828"/>
+          </a:xfrm>
+          <a:prstGeom prst="roundRect">
+            <a:avLst>
+              <a:gd name="adj" fmla="val 7126"/>
+            </a:avLst>
+          </a:prstGeom>
+          <a:solidFill>
+            <a:srgbClr val="FFFFFF"/>
+          </a:solidFill>
+          <a:ln w="12700">
+            <a:solidFill>
+              <a:srgbClr val="EAEAE8"/>
+            </a:solidFill>
+          </a:ln>
+          <a:effectLst/>
+        </p:spPr>
+        <p:style>
+          <a:lnRef idx="1">
+            <a:schemeClr val="accent1"/>
+          </a:lnRef>
+          <a:fillRef idx="3">
+            <a:schemeClr val="accent1"/>
+          </a:fillRef>
+          <a:effectRef idx="2">
+            <a:schemeClr val="accent1"/>
+          </a:effectRef>
+          <a:fontRef idx="minor">
+            <a:schemeClr val="lt1"/>
+          </a:fontRef>
+        </p:style>
+        <p:txBody>
+          <a:bodyPr rtlCol="0" anchor="ctr"/>
+          <a:lstStyle/>
+          <a:p/>
+        </p:txBody>
+      </p:sp>
+      <p:sp>
+        <p:nvSpPr>
+          <p:cNvPr id="14" name="TextBox 13"/>
+          <p:cNvSpPr txBox="1"/>
+          <p:nvPr/>
+        </p:nvSpPr>
+        <p:spPr>
+          <a:xfrm>
+            <a:off x="886968" y="4302252"/>
+            <a:ext cx="4806543" cy="357124"/>
+          </a:xfrm>
+          <a:prstGeom prst="rect">
+            <a:avLst/>
+          </a:prstGeom>
+          <a:noFill/>
+        </p:spPr>
+        <p:txBody>
+          <a:bodyPr wrap="square" lIns="0" rIns="0" tIns="0" bIns="0" anchor="t">
+            <a:spAutoFit/>
+          </a:bodyPr>
+          <a:lstStyle/>
+          <a:p>
+            <a:pPr algn="l">
+              <a:lnSpc>
+                <a:spcPct val="118000"/>
+              </a:lnSpc>
+            </a:pPr>
+            <a:r>
+              <a:rPr sz="2200" b="1" i="0">
+                <a:solidFill>
+                  <a:srgbClr val="0D7A6F"/>
+                </a:solidFill>
+                <a:latin typeface="Verdana"/>
+              </a:rPr>
+              <a:t>3 · Confirmer par écrit</a:t>
+            </a:r>
+          </a:p>
+        </p:txBody>
+      </p:sp>
+      <p:sp>
+        <p:nvSpPr>
+          <p:cNvPr id="15" name="TextBox 14"/>
+          <p:cNvSpPr txBox="1"/>
+          <p:nvPr/>
+        </p:nvSpPr>
+        <p:spPr>
+          <a:xfrm>
+            <a:off x="886968" y="4686808"/>
+            <a:ext cx="4806543" cy="1119632"/>
+          </a:xfrm>
+          <a:prstGeom prst="rect">
+            <a:avLst/>
+          </a:prstGeom>
+          <a:noFill/>
+        </p:spPr>
+        <p:txBody>
+          <a:bodyPr wrap="square" lIns="0" rIns="0" tIns="0" bIns="0" anchor="t">
+            <a:spAutoFit/>
+          </a:bodyPr>
+          <a:lstStyle/>
+          <a:p>
+            <a:pPr algn="l">
+              <a:lnSpc>
+                <a:spcPct val="142000"/>
+              </a:lnSpc>
+            </a:pPr>
+            <a:r>
+              <a:rPr sz="1500" b="0" i="0">
+                <a:solidFill>
+                  <a:srgbClr val="3A3D40"/>
+                </a:solidFill>
+                <a:latin typeface="Verdana"/>
+              </a:rPr>
+              <a:t>Avant la date limite indiquée. Une place obtenue de vive voix et jamais confirmée n'existe pas.</a:t>
+            </a:r>
+          </a:p>
+        </p:txBody>
+      </p:sp>
+      <p:sp>
+        <p:nvSpPr>
+          <p:cNvPr id="16" name="Rounded Rectangle 15"/>
+          <p:cNvSpPr/>
+          <p:nvPr/>
+        </p:nvSpPr>
+        <p:spPr>
+          <a:xfrm>
+            <a:off x="6178143" y="4027932"/>
+            <a:ext cx="5446623" cy="2052828"/>
+          </a:xfrm>
+          <a:prstGeom prst="roundRect">
+            <a:avLst>
+              <a:gd name="adj" fmla="val 7126"/>
+            </a:avLst>
+          </a:prstGeom>
+          <a:solidFill>
+            <a:srgbClr val="FFFFFF"/>
+          </a:solidFill>
+          <a:ln w="12700">
+            <a:solidFill>
+              <a:srgbClr val="EAEAE8"/>
+            </a:solidFill>
+          </a:ln>
+          <a:effectLst/>
+        </p:spPr>
+        <p:style>
+          <a:lnRef idx="1">
+            <a:schemeClr val="accent1"/>
+          </a:lnRef>
+          <a:fillRef idx="3">
+            <a:schemeClr val="accent1"/>
+          </a:fillRef>
+          <a:effectRef idx="2">
+            <a:schemeClr val="accent1"/>
+          </a:effectRef>
+          <a:fontRef idx="minor">
+            <a:schemeClr val="lt1"/>
+          </a:fontRef>
+        </p:style>
+        <p:txBody>
+          <a:bodyPr rtlCol="0" anchor="ctr"/>
+          <a:lstStyle/>
+          <a:p/>
+        </p:txBody>
+      </p:sp>
+      <p:sp>
+        <p:nvSpPr>
+          <p:cNvPr id="17" name="TextBox 16"/>
+          <p:cNvSpPr txBox="1"/>
+          <p:nvPr/>
+        </p:nvSpPr>
+        <p:spPr>
+          <a:xfrm>
+            <a:off x="6498183" y="4302252"/>
+            <a:ext cx="4806543" cy="357124"/>
+          </a:xfrm>
+          <a:prstGeom prst="rect">
+            <a:avLst/>
+          </a:prstGeom>
+          <a:noFill/>
+        </p:spPr>
+        <p:txBody>
+          <a:bodyPr wrap="square" lIns="0" rIns="0" tIns="0" bIns="0" anchor="t">
+            <a:spAutoFit/>
+          </a:bodyPr>
+          <a:lstStyle/>
+          <a:p>
+            <a:pPr algn="l">
+              <a:lnSpc>
+                <a:spcPct val="118000"/>
+              </a:lnSpc>
+            </a:pPr>
+            <a:r>
+              <a:rPr sz="2200" b="1" i="0">
+                <a:solidFill>
+                  <a:srgbClr val="0D7A6F"/>
+                </a:solidFill>
+                <a:latin typeface="Verdana"/>
+              </a:rPr>
+              <a:t>4 · Tenir sa durée</a:t>
+            </a:r>
+          </a:p>
+        </p:txBody>
+      </p:sp>
+      <p:sp>
+        <p:nvSpPr>
+          <p:cNvPr id="18" name="TextBox 17"/>
+          <p:cNvSpPr txBox="1"/>
+          <p:nvPr/>
+        </p:nvSpPr>
+        <p:spPr>
+          <a:xfrm>
+            <a:off x="6498183" y="4686808"/>
+            <a:ext cx="4806543" cy="1119632"/>
+          </a:xfrm>
+          <a:prstGeom prst="rect">
+            <a:avLst/>
+          </a:prstGeom>
+          <a:noFill/>
+        </p:spPr>
+        <p:txBody>
+          <a:bodyPr wrap="square" lIns="0" rIns="0" tIns="0" bIns="0" anchor="t">
+            <a:spAutoFit/>
+          </a:bodyPr>
+          <a:lstStyle/>
+          <a:p>
+            <a:pPr algn="l">
+              <a:lnSpc>
+                <a:spcPct val="142000"/>
+              </a:lnSpc>
+            </a:pPr>
+            <a:r>
+              <a:rPr sz="1500" b="0" i="0">
+                <a:solidFill>
+                  <a:srgbClr val="3A3D40"/>
+                </a:solidFill>
+                <a:latin typeface="Verdana"/>
+              </a:rPr>
+              <a:t>Demander quinze minutes et en prendre vingt-cinq est la façon la plus sûre de ne plus jamais en obtenir.</a:t>
             </a:r>
           </a:p>
         </p:txBody>
